--- a/paper/media/fig3a.pptx
+++ b/paper/media/fig3a.pptx
@@ -1,13 +1,13 @@
 
 <file path=ppt/presentation.xml><?xml version="1.0" encoding="utf-8"?>
-<p:presentation xmlns:a="http://schemas.openxmlformats.org/drawingml/2006/main" xmlns:r="http://schemas.openxmlformats.org/officeDocument/2006/relationships" xmlns:p="http://schemas.openxmlformats.org/presentationml/2006/main" saveSubsetFonts="1" autoCompressPictures="0">
+<p:presentation xmlns:a="http://schemas.openxmlformats.org/drawingml/2006/main" xmlns:r="http://schemas.openxmlformats.org/officeDocument/2006/relationships" xmlns:p="http://schemas.openxmlformats.org/presentationml/2006/main" autoCompressPictures="0">
   <p:sldMasterIdLst>
     <p:sldMasterId id="2147483648" r:id="rId1"/>
   </p:sldMasterIdLst>
   <p:sldIdLst>
-    <p:sldId id="256" r:id="rId7"/>
+    <p:sldId id="258" r:id="rId2"/>
   </p:sldIdLst>
-  <p:sldSz cx="9144000" cy="6858000" type="screen4x3"/>
+  <p:sldSz cx="5029200" cy="4114800"/>
   <p:notesSz cx="6858000" cy="9144000"/>
   <p:defaultTextStyle>
     <a:defPPr>
@@ -104,6 +104,22 @@
       </a:defRPr>
     </a:lvl9pPr>
   </p:defaultTextStyle>
+  <p:extLst>
+    <p:ext uri="{EFAFB233-063F-42B5-8137-9DF3F51BA10A}">
+      <p15:sldGuideLst xmlns:p15="http://schemas.microsoft.com/office/powerpoint/2012/main">
+        <p15:guide id="1" orient="horz" pos="2160" userDrawn="1">
+          <p15:clr>
+            <a:srgbClr val="A4A3A4"/>
+          </p15:clr>
+        </p15:guide>
+        <p15:guide id="2" pos="2880" userDrawn="1">
+          <p15:clr>
+            <a:srgbClr val="A4A3A4"/>
+          </p15:clr>
+        </p15:guide>
+      </p15:sldGuideLst>
+    </p:ext>
+  </p:extLst>
 </p:presentation>
 </file>
 
@@ -145,10 +161,9 @@
           <a:lstStyle/>
           <a:p>
             <a:r>
-              <a:rPr lang="en-US" smtClean="0"/>
+              <a:rPr lang="en-US"/>
               <a:t>Click to edit Master title style</a:t>
             </a:r>
-            <a:endParaRPr lang="en-US"/>
           </a:p>
         </p:txBody>
       </p:sp>
@@ -264,10 +279,9 @@
           </a:lstStyle>
           <a:p>
             <a:r>
-              <a:rPr lang="en-US" smtClean="0"/>
+              <a:rPr lang="en-US"/>
               <a:t>Click to edit Master subtitle style</a:t>
             </a:r>
-            <a:endParaRPr lang="en-US"/>
           </a:p>
         </p:txBody>
       </p:sp>
@@ -288,7 +302,7 @@
           <a:p>
             <a:fld id="{5BCAD085-E8A6-8845-BD4E-CB4CCA059FC4}" type="datetimeFigureOut">
               <a:rPr lang="en-US" smtClean="0"/>
-              <a:t>1/27/13</a:t>
+              <a:t>3/13/2026</a:t>
             </a:fld>
             <a:endParaRPr lang="en-US"/>
           </a:p>
@@ -337,11 +351,6 @@
         </p:txBody>
       </p:sp>
     </p:spTree>
-    <p:extLst>
-      <p:ext uri="{BB962C8B-B14F-4D97-AF65-F5344CB8AC3E}">
-        <p14:creationId xmlns:p14="http://schemas.microsoft.com/office/powerpoint/2010/main" val="3168075583"/>
-      </p:ext>
-    </p:extLst>
   </p:cSld>
   <p:clrMapOvr>
     <a:masterClrMapping/>
@@ -382,10 +391,9 @@
           <a:lstStyle/>
           <a:p>
             <a:r>
-              <a:rPr lang="en-US" smtClean="0"/>
+              <a:rPr lang="en-US"/>
               <a:t>Click to edit Master title style</a:t>
             </a:r>
-            <a:endParaRPr lang="en-US"/>
           </a:p>
         </p:txBody>
       </p:sp>
@@ -406,38 +414,37 @@
           <a:p>
             <a:pPr lvl="0"/>
             <a:r>
-              <a:rPr lang="en-US" smtClean="0"/>
+              <a:rPr lang="en-US"/>
               <a:t>Click to edit Master text styles</a:t>
             </a:r>
           </a:p>
           <a:p>
             <a:pPr lvl="1"/>
             <a:r>
-              <a:rPr lang="en-US" smtClean="0"/>
+              <a:rPr lang="en-US"/>
               <a:t>Second level</a:t>
             </a:r>
           </a:p>
           <a:p>
             <a:pPr lvl="2"/>
             <a:r>
-              <a:rPr lang="en-US" smtClean="0"/>
+              <a:rPr lang="en-US"/>
               <a:t>Third level</a:t>
             </a:r>
           </a:p>
           <a:p>
             <a:pPr lvl="3"/>
             <a:r>
-              <a:rPr lang="en-US" smtClean="0"/>
+              <a:rPr lang="en-US"/>
               <a:t>Fourth level</a:t>
             </a:r>
           </a:p>
           <a:p>
             <a:pPr lvl="4"/>
             <a:r>
-              <a:rPr lang="en-US" smtClean="0"/>
+              <a:rPr lang="en-US"/>
               <a:t>Fifth level</a:t>
             </a:r>
-            <a:endParaRPr lang="en-US"/>
           </a:p>
         </p:txBody>
       </p:sp>
@@ -458,7 +465,7 @@
           <a:p>
             <a:fld id="{5BCAD085-E8A6-8845-BD4E-CB4CCA059FC4}" type="datetimeFigureOut">
               <a:rPr lang="en-US" smtClean="0"/>
-              <a:t>1/27/13</a:t>
+              <a:t>3/13/2026</a:t>
             </a:fld>
             <a:endParaRPr lang="en-US"/>
           </a:p>
@@ -507,11 +514,6 @@
         </p:txBody>
       </p:sp>
     </p:spTree>
-    <p:extLst>
-      <p:ext uri="{BB962C8B-B14F-4D97-AF65-F5344CB8AC3E}">
-        <p14:creationId xmlns:p14="http://schemas.microsoft.com/office/powerpoint/2010/main" val="2910927964"/>
-      </p:ext>
-    </p:extLst>
   </p:cSld>
   <p:clrMapOvr>
     <a:masterClrMapping/>
@@ -557,10 +559,9 @@
           <a:lstStyle/>
           <a:p>
             <a:r>
-              <a:rPr lang="en-US" smtClean="0"/>
+              <a:rPr lang="en-US"/>
               <a:t>Click to edit Master title style</a:t>
             </a:r>
-            <a:endParaRPr lang="en-US"/>
           </a:p>
         </p:txBody>
       </p:sp>
@@ -586,38 +587,37 @@
           <a:p>
             <a:pPr lvl="0"/>
             <a:r>
-              <a:rPr lang="en-US" smtClean="0"/>
+              <a:rPr lang="en-US"/>
               <a:t>Click to edit Master text styles</a:t>
             </a:r>
           </a:p>
           <a:p>
             <a:pPr lvl="1"/>
             <a:r>
-              <a:rPr lang="en-US" smtClean="0"/>
+              <a:rPr lang="en-US"/>
               <a:t>Second level</a:t>
             </a:r>
           </a:p>
           <a:p>
             <a:pPr lvl="2"/>
             <a:r>
-              <a:rPr lang="en-US" smtClean="0"/>
+              <a:rPr lang="en-US"/>
               <a:t>Third level</a:t>
             </a:r>
           </a:p>
           <a:p>
             <a:pPr lvl="3"/>
             <a:r>
-              <a:rPr lang="en-US" smtClean="0"/>
+              <a:rPr lang="en-US"/>
               <a:t>Fourth level</a:t>
             </a:r>
           </a:p>
           <a:p>
             <a:pPr lvl="4"/>
             <a:r>
-              <a:rPr lang="en-US" smtClean="0"/>
+              <a:rPr lang="en-US"/>
               <a:t>Fifth level</a:t>
             </a:r>
-            <a:endParaRPr lang="en-US"/>
           </a:p>
         </p:txBody>
       </p:sp>
@@ -638,7 +638,7 @@
           <a:p>
             <a:fld id="{5BCAD085-E8A6-8845-BD4E-CB4CCA059FC4}" type="datetimeFigureOut">
               <a:rPr lang="en-US" smtClean="0"/>
-              <a:t>1/27/13</a:t>
+              <a:t>3/13/2026</a:t>
             </a:fld>
             <a:endParaRPr lang="en-US"/>
           </a:p>
@@ -687,11 +687,6 @@
         </p:txBody>
       </p:sp>
     </p:spTree>
-    <p:extLst>
-      <p:ext uri="{BB962C8B-B14F-4D97-AF65-F5344CB8AC3E}">
-        <p14:creationId xmlns:p14="http://schemas.microsoft.com/office/powerpoint/2010/main" val="3612223792"/>
-      </p:ext>
-    </p:extLst>
   </p:cSld>
   <p:clrMapOvr>
     <a:masterClrMapping/>
@@ -732,10 +727,9 @@
           <a:lstStyle/>
           <a:p>
             <a:r>
-              <a:rPr lang="en-US" smtClean="0"/>
+              <a:rPr lang="en-US"/>
               <a:t>Click to edit Master title style</a:t>
             </a:r>
-            <a:endParaRPr lang="en-US"/>
           </a:p>
         </p:txBody>
       </p:sp>
@@ -756,38 +750,37 @@
           <a:p>
             <a:pPr lvl="0"/>
             <a:r>
-              <a:rPr lang="en-US" smtClean="0"/>
+              <a:rPr lang="en-US"/>
               <a:t>Click to edit Master text styles</a:t>
             </a:r>
           </a:p>
           <a:p>
             <a:pPr lvl="1"/>
             <a:r>
-              <a:rPr lang="en-US" smtClean="0"/>
+              <a:rPr lang="en-US"/>
               <a:t>Second level</a:t>
             </a:r>
           </a:p>
           <a:p>
             <a:pPr lvl="2"/>
             <a:r>
-              <a:rPr lang="en-US" smtClean="0"/>
+              <a:rPr lang="en-US"/>
               <a:t>Third level</a:t>
             </a:r>
           </a:p>
           <a:p>
             <a:pPr lvl="3"/>
             <a:r>
-              <a:rPr lang="en-US" smtClean="0"/>
+              <a:rPr lang="en-US"/>
               <a:t>Fourth level</a:t>
             </a:r>
           </a:p>
           <a:p>
             <a:pPr lvl="4"/>
             <a:r>
-              <a:rPr lang="en-US" smtClean="0"/>
+              <a:rPr lang="en-US"/>
               <a:t>Fifth level</a:t>
             </a:r>
-            <a:endParaRPr lang="en-US"/>
           </a:p>
         </p:txBody>
       </p:sp>
@@ -808,7 +801,7 @@
           <a:p>
             <a:fld id="{5BCAD085-E8A6-8845-BD4E-CB4CCA059FC4}" type="datetimeFigureOut">
               <a:rPr lang="en-US" smtClean="0"/>
-              <a:t>1/27/13</a:t>
+              <a:t>3/13/2026</a:t>
             </a:fld>
             <a:endParaRPr lang="en-US"/>
           </a:p>
@@ -857,11 +850,6 @@
         </p:txBody>
       </p:sp>
     </p:spTree>
-    <p:extLst>
-      <p:ext uri="{BB962C8B-B14F-4D97-AF65-F5344CB8AC3E}">
-        <p14:creationId xmlns:p14="http://schemas.microsoft.com/office/powerpoint/2010/main" val="2614314258"/>
-      </p:ext>
-    </p:extLst>
   </p:cSld>
   <p:clrMapOvr>
     <a:masterClrMapping/>
@@ -911,10 +899,9 @@
           </a:lstStyle>
           <a:p>
             <a:r>
-              <a:rPr lang="en-US" smtClean="0"/>
+              <a:rPr lang="en-US"/>
               <a:t>Click to edit Master title style</a:t>
             </a:r>
-            <a:endParaRPr lang="en-US"/>
           </a:p>
         </p:txBody>
       </p:sp>
@@ -1031,7 +1018,7 @@
           <a:p>
             <a:pPr lvl="0"/>
             <a:r>
-              <a:rPr lang="en-US" smtClean="0"/>
+              <a:rPr lang="en-US"/>
               <a:t>Click to edit Master text styles</a:t>
             </a:r>
           </a:p>
@@ -1054,7 +1041,7 @@
           <a:p>
             <a:fld id="{5BCAD085-E8A6-8845-BD4E-CB4CCA059FC4}" type="datetimeFigureOut">
               <a:rPr lang="en-US" smtClean="0"/>
-              <a:t>1/27/13</a:t>
+              <a:t>3/13/2026</a:t>
             </a:fld>
             <a:endParaRPr lang="en-US"/>
           </a:p>
@@ -1103,11 +1090,6 @@
         </p:txBody>
       </p:sp>
     </p:spTree>
-    <p:extLst>
-      <p:ext uri="{BB962C8B-B14F-4D97-AF65-F5344CB8AC3E}">
-        <p14:creationId xmlns:p14="http://schemas.microsoft.com/office/powerpoint/2010/main" val="960648375"/>
-      </p:ext>
-    </p:extLst>
   </p:cSld>
   <p:clrMapOvr>
     <a:masterClrMapping/>
@@ -1148,10 +1130,9 @@
           <a:lstStyle/>
           <a:p>
             <a:r>
-              <a:rPr lang="en-US" smtClean="0"/>
+              <a:rPr lang="en-US"/>
               <a:t>Click to edit Master title style</a:t>
             </a:r>
-            <a:endParaRPr lang="en-US"/>
           </a:p>
         </p:txBody>
       </p:sp>
@@ -1205,38 +1186,37 @@
           <a:p>
             <a:pPr lvl="0"/>
             <a:r>
-              <a:rPr lang="en-US" smtClean="0"/>
+              <a:rPr lang="en-US"/>
               <a:t>Click to edit Master text styles</a:t>
             </a:r>
           </a:p>
           <a:p>
             <a:pPr lvl="1"/>
             <a:r>
-              <a:rPr lang="en-US" smtClean="0"/>
+              <a:rPr lang="en-US"/>
               <a:t>Second level</a:t>
             </a:r>
           </a:p>
           <a:p>
             <a:pPr lvl="2"/>
             <a:r>
-              <a:rPr lang="en-US" smtClean="0"/>
+              <a:rPr lang="en-US"/>
               <a:t>Third level</a:t>
             </a:r>
           </a:p>
           <a:p>
             <a:pPr lvl="3"/>
             <a:r>
-              <a:rPr lang="en-US" smtClean="0"/>
+              <a:rPr lang="en-US"/>
               <a:t>Fourth level</a:t>
             </a:r>
           </a:p>
           <a:p>
             <a:pPr lvl="4"/>
             <a:r>
-              <a:rPr lang="en-US" smtClean="0"/>
+              <a:rPr lang="en-US"/>
               <a:t>Fifth level</a:t>
             </a:r>
-            <a:endParaRPr lang="en-US"/>
           </a:p>
         </p:txBody>
       </p:sp>
@@ -1290,38 +1270,37 @@
           <a:p>
             <a:pPr lvl="0"/>
             <a:r>
-              <a:rPr lang="en-US" smtClean="0"/>
+              <a:rPr lang="en-US"/>
               <a:t>Click to edit Master text styles</a:t>
             </a:r>
           </a:p>
           <a:p>
             <a:pPr lvl="1"/>
             <a:r>
-              <a:rPr lang="en-US" smtClean="0"/>
+              <a:rPr lang="en-US"/>
               <a:t>Second level</a:t>
             </a:r>
           </a:p>
           <a:p>
             <a:pPr lvl="2"/>
             <a:r>
-              <a:rPr lang="en-US" smtClean="0"/>
+              <a:rPr lang="en-US"/>
               <a:t>Third level</a:t>
             </a:r>
           </a:p>
           <a:p>
             <a:pPr lvl="3"/>
             <a:r>
-              <a:rPr lang="en-US" smtClean="0"/>
+              <a:rPr lang="en-US"/>
               <a:t>Fourth level</a:t>
             </a:r>
           </a:p>
           <a:p>
             <a:pPr lvl="4"/>
             <a:r>
-              <a:rPr lang="en-US" smtClean="0"/>
+              <a:rPr lang="en-US"/>
               <a:t>Fifth level</a:t>
             </a:r>
-            <a:endParaRPr lang="en-US"/>
           </a:p>
         </p:txBody>
       </p:sp>
@@ -1342,7 +1321,7 @@
           <a:p>
             <a:fld id="{5BCAD085-E8A6-8845-BD4E-CB4CCA059FC4}" type="datetimeFigureOut">
               <a:rPr lang="en-US" smtClean="0"/>
-              <a:t>1/27/13</a:t>
+              <a:t>3/13/2026</a:t>
             </a:fld>
             <a:endParaRPr lang="en-US"/>
           </a:p>
@@ -1391,11 +1370,6 @@
         </p:txBody>
       </p:sp>
     </p:spTree>
-    <p:extLst>
-      <p:ext uri="{BB962C8B-B14F-4D97-AF65-F5344CB8AC3E}">
-        <p14:creationId xmlns:p14="http://schemas.microsoft.com/office/powerpoint/2010/main" val="2782244947"/>
-      </p:ext>
-    </p:extLst>
   </p:cSld>
   <p:clrMapOvr>
     <a:masterClrMapping/>
@@ -1440,10 +1414,9 @@
           </a:lstStyle>
           <a:p>
             <a:r>
-              <a:rPr lang="en-US" smtClean="0"/>
+              <a:rPr lang="en-US"/>
               <a:t>Click to edit Master title style</a:t>
             </a:r>
-            <a:endParaRPr lang="en-US"/>
           </a:p>
         </p:txBody>
       </p:sp>
@@ -1506,7 +1479,7 @@
           <a:p>
             <a:pPr lvl="0"/>
             <a:r>
-              <a:rPr lang="en-US" smtClean="0"/>
+              <a:rPr lang="en-US"/>
               <a:t>Click to edit Master text styles</a:t>
             </a:r>
           </a:p>
@@ -1562,38 +1535,37 @@
           <a:p>
             <a:pPr lvl="0"/>
             <a:r>
-              <a:rPr lang="en-US" smtClean="0"/>
+              <a:rPr lang="en-US"/>
               <a:t>Click to edit Master text styles</a:t>
             </a:r>
           </a:p>
           <a:p>
             <a:pPr lvl="1"/>
             <a:r>
-              <a:rPr lang="en-US" smtClean="0"/>
+              <a:rPr lang="en-US"/>
               <a:t>Second level</a:t>
             </a:r>
           </a:p>
           <a:p>
             <a:pPr lvl="2"/>
             <a:r>
-              <a:rPr lang="en-US" smtClean="0"/>
+              <a:rPr lang="en-US"/>
               <a:t>Third level</a:t>
             </a:r>
           </a:p>
           <a:p>
             <a:pPr lvl="3"/>
             <a:r>
-              <a:rPr lang="en-US" smtClean="0"/>
+              <a:rPr lang="en-US"/>
               <a:t>Fourth level</a:t>
             </a:r>
           </a:p>
           <a:p>
             <a:pPr lvl="4"/>
             <a:r>
-              <a:rPr lang="en-US" smtClean="0"/>
+              <a:rPr lang="en-US"/>
               <a:t>Fifth level</a:t>
             </a:r>
-            <a:endParaRPr lang="en-US"/>
           </a:p>
         </p:txBody>
       </p:sp>
@@ -1656,7 +1628,7 @@
           <a:p>
             <a:pPr lvl="0"/>
             <a:r>
-              <a:rPr lang="en-US" smtClean="0"/>
+              <a:rPr lang="en-US"/>
               <a:t>Click to edit Master text styles</a:t>
             </a:r>
           </a:p>
@@ -1712,38 +1684,37 @@
           <a:p>
             <a:pPr lvl="0"/>
             <a:r>
-              <a:rPr lang="en-US" smtClean="0"/>
+              <a:rPr lang="en-US"/>
               <a:t>Click to edit Master text styles</a:t>
             </a:r>
           </a:p>
           <a:p>
             <a:pPr lvl="1"/>
             <a:r>
-              <a:rPr lang="en-US" smtClean="0"/>
+              <a:rPr lang="en-US"/>
               <a:t>Second level</a:t>
             </a:r>
           </a:p>
           <a:p>
             <a:pPr lvl="2"/>
             <a:r>
-              <a:rPr lang="en-US" smtClean="0"/>
+              <a:rPr lang="en-US"/>
               <a:t>Third level</a:t>
             </a:r>
           </a:p>
           <a:p>
             <a:pPr lvl="3"/>
             <a:r>
-              <a:rPr lang="en-US" smtClean="0"/>
+              <a:rPr lang="en-US"/>
               <a:t>Fourth level</a:t>
             </a:r>
           </a:p>
           <a:p>
             <a:pPr lvl="4"/>
             <a:r>
-              <a:rPr lang="en-US" smtClean="0"/>
+              <a:rPr lang="en-US"/>
               <a:t>Fifth level</a:t>
             </a:r>
-            <a:endParaRPr lang="en-US"/>
           </a:p>
         </p:txBody>
       </p:sp>
@@ -1764,7 +1735,7 @@
           <a:p>
             <a:fld id="{5BCAD085-E8A6-8845-BD4E-CB4CCA059FC4}" type="datetimeFigureOut">
               <a:rPr lang="en-US" smtClean="0"/>
-              <a:t>1/27/13</a:t>
+              <a:t>3/13/2026</a:t>
             </a:fld>
             <a:endParaRPr lang="en-US"/>
           </a:p>
@@ -1813,11 +1784,6 @@
         </p:txBody>
       </p:sp>
     </p:spTree>
-    <p:extLst>
-      <p:ext uri="{BB962C8B-B14F-4D97-AF65-F5344CB8AC3E}">
-        <p14:creationId xmlns:p14="http://schemas.microsoft.com/office/powerpoint/2010/main" val="990158736"/>
-      </p:ext>
-    </p:extLst>
   </p:cSld>
   <p:clrMapOvr>
     <a:masterClrMapping/>
@@ -1858,10 +1824,9 @@
           <a:lstStyle/>
           <a:p>
             <a:r>
-              <a:rPr lang="en-US" smtClean="0"/>
+              <a:rPr lang="en-US"/>
               <a:t>Click to edit Master title style</a:t>
             </a:r>
-            <a:endParaRPr lang="en-US"/>
           </a:p>
         </p:txBody>
       </p:sp>
@@ -1882,7 +1847,7 @@
           <a:p>
             <a:fld id="{5BCAD085-E8A6-8845-BD4E-CB4CCA059FC4}" type="datetimeFigureOut">
               <a:rPr lang="en-US" smtClean="0"/>
-              <a:t>1/27/13</a:t>
+              <a:t>3/13/2026</a:t>
             </a:fld>
             <a:endParaRPr lang="en-US"/>
           </a:p>
@@ -1931,11 +1896,6 @@
         </p:txBody>
       </p:sp>
     </p:spTree>
-    <p:extLst>
-      <p:ext uri="{BB962C8B-B14F-4D97-AF65-F5344CB8AC3E}">
-        <p14:creationId xmlns:p14="http://schemas.microsoft.com/office/powerpoint/2010/main" val="727027711"/>
-      </p:ext>
-    </p:extLst>
   </p:cSld>
   <p:clrMapOvr>
     <a:masterClrMapping/>
@@ -1977,7 +1937,7 @@
           <a:p>
             <a:fld id="{5BCAD085-E8A6-8845-BD4E-CB4CCA059FC4}" type="datetimeFigureOut">
               <a:rPr lang="en-US" smtClean="0"/>
-              <a:t>1/27/13</a:t>
+              <a:t>3/13/2026</a:t>
             </a:fld>
             <a:endParaRPr lang="en-US"/>
           </a:p>
@@ -2026,11 +1986,6 @@
         </p:txBody>
       </p:sp>
     </p:spTree>
-    <p:extLst>
-      <p:ext uri="{BB962C8B-B14F-4D97-AF65-F5344CB8AC3E}">
-        <p14:creationId xmlns:p14="http://schemas.microsoft.com/office/powerpoint/2010/main" val="1212999818"/>
-      </p:ext>
-    </p:extLst>
   </p:cSld>
   <p:clrMapOvr>
     <a:masterClrMapping/>
@@ -2080,10 +2035,9 @@
           </a:lstStyle>
           <a:p>
             <a:r>
-              <a:rPr lang="en-US" smtClean="0"/>
+              <a:rPr lang="en-US"/>
               <a:t>Click to edit Master title style</a:t>
             </a:r>
-            <a:endParaRPr lang="en-US"/>
           </a:p>
         </p:txBody>
       </p:sp>
@@ -2137,38 +2091,37 @@
           <a:p>
             <a:pPr lvl="0"/>
             <a:r>
-              <a:rPr lang="en-US" smtClean="0"/>
+              <a:rPr lang="en-US"/>
               <a:t>Click to edit Master text styles</a:t>
             </a:r>
           </a:p>
           <a:p>
             <a:pPr lvl="1"/>
             <a:r>
-              <a:rPr lang="en-US" smtClean="0"/>
+              <a:rPr lang="en-US"/>
               <a:t>Second level</a:t>
             </a:r>
           </a:p>
           <a:p>
             <a:pPr lvl="2"/>
             <a:r>
-              <a:rPr lang="en-US" smtClean="0"/>
+              <a:rPr lang="en-US"/>
               <a:t>Third level</a:t>
             </a:r>
           </a:p>
           <a:p>
             <a:pPr lvl="3"/>
             <a:r>
-              <a:rPr lang="en-US" smtClean="0"/>
+              <a:rPr lang="en-US"/>
               <a:t>Fourth level</a:t>
             </a:r>
           </a:p>
           <a:p>
             <a:pPr lvl="4"/>
             <a:r>
-              <a:rPr lang="en-US" smtClean="0"/>
+              <a:rPr lang="en-US"/>
               <a:t>Fifth level</a:t>
             </a:r>
-            <a:endParaRPr lang="en-US"/>
           </a:p>
         </p:txBody>
       </p:sp>
@@ -2231,7 +2184,7 @@
           <a:p>
             <a:pPr lvl="0"/>
             <a:r>
-              <a:rPr lang="en-US" smtClean="0"/>
+              <a:rPr lang="en-US"/>
               <a:t>Click to edit Master text styles</a:t>
             </a:r>
           </a:p>
@@ -2254,7 +2207,7 @@
           <a:p>
             <a:fld id="{5BCAD085-E8A6-8845-BD4E-CB4CCA059FC4}" type="datetimeFigureOut">
               <a:rPr lang="en-US" smtClean="0"/>
-              <a:t>1/27/13</a:t>
+              <a:t>3/13/2026</a:t>
             </a:fld>
             <a:endParaRPr lang="en-US"/>
           </a:p>
@@ -2303,11 +2256,6 @@
         </p:txBody>
       </p:sp>
     </p:spTree>
-    <p:extLst>
-      <p:ext uri="{BB962C8B-B14F-4D97-AF65-F5344CB8AC3E}">
-        <p14:creationId xmlns:p14="http://schemas.microsoft.com/office/powerpoint/2010/main" val="1840726560"/>
-      </p:ext>
-    </p:extLst>
   </p:cSld>
   <p:clrMapOvr>
     <a:masterClrMapping/>
@@ -2357,10 +2305,9 @@
           </a:lstStyle>
           <a:p>
             <a:r>
-              <a:rPr lang="en-US" smtClean="0"/>
+              <a:rPr lang="en-US"/>
               <a:t>Click to edit Master title style</a:t>
             </a:r>
-            <a:endParaRPr lang="en-US"/>
           </a:p>
         </p:txBody>
       </p:sp>
@@ -2484,7 +2431,7 @@
           <a:p>
             <a:pPr lvl="0"/>
             <a:r>
-              <a:rPr lang="en-US" smtClean="0"/>
+              <a:rPr lang="en-US"/>
               <a:t>Click to edit Master text styles</a:t>
             </a:r>
           </a:p>
@@ -2507,7 +2454,7 @@
           <a:p>
             <a:fld id="{5BCAD085-E8A6-8845-BD4E-CB4CCA059FC4}" type="datetimeFigureOut">
               <a:rPr lang="en-US" smtClean="0"/>
-              <a:t>1/27/13</a:t>
+              <a:t>3/13/2026</a:t>
             </a:fld>
             <a:endParaRPr lang="en-US"/>
           </a:p>
@@ -2556,11 +2503,6 @@
         </p:txBody>
       </p:sp>
     </p:spTree>
-    <p:extLst>
-      <p:ext uri="{BB962C8B-B14F-4D97-AF65-F5344CB8AC3E}">
-        <p14:creationId xmlns:p14="http://schemas.microsoft.com/office/powerpoint/2010/main" val="3889236939"/>
-      </p:ext>
-    </p:extLst>
   </p:cSld>
   <p:clrMapOvr>
     <a:masterClrMapping/>
@@ -2616,10 +2558,9 @@
           <a:lstStyle/>
           <a:p>
             <a:r>
-              <a:rPr lang="en-US" smtClean="0"/>
+              <a:rPr lang="en-US"/>
               <a:t>Click to edit Master title style</a:t>
             </a:r>
-            <a:endParaRPr lang="en-US"/>
           </a:p>
         </p:txBody>
       </p:sp>
@@ -2650,38 +2591,37 @@
           <a:p>
             <a:pPr lvl="0"/>
             <a:r>
-              <a:rPr lang="en-US" smtClean="0"/>
+              <a:rPr lang="en-US"/>
               <a:t>Click to edit Master text styles</a:t>
             </a:r>
           </a:p>
           <a:p>
             <a:pPr lvl="1"/>
             <a:r>
-              <a:rPr lang="en-US" smtClean="0"/>
+              <a:rPr lang="en-US"/>
               <a:t>Second level</a:t>
             </a:r>
           </a:p>
           <a:p>
             <a:pPr lvl="2"/>
             <a:r>
-              <a:rPr lang="en-US" smtClean="0"/>
+              <a:rPr lang="en-US"/>
               <a:t>Third level</a:t>
             </a:r>
           </a:p>
           <a:p>
             <a:pPr lvl="3"/>
             <a:r>
-              <a:rPr lang="en-US" smtClean="0"/>
+              <a:rPr lang="en-US"/>
               <a:t>Fourth level</a:t>
             </a:r>
           </a:p>
           <a:p>
             <a:pPr lvl="4"/>
             <a:r>
-              <a:rPr lang="en-US" smtClean="0"/>
+              <a:rPr lang="en-US"/>
               <a:t>Fifth level</a:t>
             </a:r>
-            <a:endParaRPr lang="en-US"/>
           </a:p>
         </p:txBody>
       </p:sp>
@@ -2720,7 +2660,7 @@
           <a:p>
             <a:fld id="{5BCAD085-E8A6-8845-BD4E-CB4CCA059FC4}" type="datetimeFigureOut">
               <a:rPr lang="en-US" smtClean="0"/>
-              <a:t>1/27/13</a:t>
+              <a:t>3/13/2026</a:t>
             </a:fld>
             <a:endParaRPr lang="en-US"/>
           </a:p>
@@ -2805,11 +2745,6 @@
         </p:txBody>
       </p:sp>
     </p:spTree>
-    <p:extLst>
-      <p:ext uri="{BB962C8B-B14F-4D97-AF65-F5344CB8AC3E}">
-        <p14:creationId xmlns:p14="http://schemas.microsoft.com/office/powerpoint/2010/main" val="2209977519"/>
-      </p:ext>
-    </p:extLst>
   </p:cSld>
   <p:clrMap bg1="lt1" tx1="dk1" bg2="lt2" tx2="dk2" accent1="accent1" accent2="accent2" accent3="accent3" accent4="accent4" accent5="accent5" accent6="accent6" hlink="hlink" folHlink="folHlink"/>
   <p:sldLayoutIdLst>
@@ -2847,7 +2782,7 @@
         <a:spcBef>
           <a:spcPct val="20000"/>
         </a:spcBef>
-        <a:buFont typeface="Arial"/>
+        <a:buFont typeface="Arial" panose="020B0604020202020204"/>
         <a:buChar char="•"/>
         <a:defRPr sz="3200" kern="1200">
           <a:solidFill>
@@ -2862,7 +2797,7 @@
         <a:spcBef>
           <a:spcPct val="20000"/>
         </a:spcBef>
-        <a:buFont typeface="Arial"/>
+        <a:buFont typeface="Arial" panose="020B0604020202020204"/>
         <a:buChar char="–"/>
         <a:defRPr sz="2800" kern="1200">
           <a:solidFill>
@@ -2877,7 +2812,7 @@
         <a:spcBef>
           <a:spcPct val="20000"/>
         </a:spcBef>
-        <a:buFont typeface="Arial"/>
+        <a:buFont typeface="Arial" panose="020B0604020202020204"/>
         <a:buChar char="•"/>
         <a:defRPr sz="2400" kern="1200">
           <a:solidFill>
@@ -2892,7 +2827,7 @@
         <a:spcBef>
           <a:spcPct val="20000"/>
         </a:spcBef>
-        <a:buFont typeface="Arial"/>
+        <a:buFont typeface="Arial" panose="020B0604020202020204"/>
         <a:buChar char="–"/>
         <a:defRPr sz="2000" kern="1200">
           <a:solidFill>
@@ -2907,7 +2842,7 @@
         <a:spcBef>
           <a:spcPct val="20000"/>
         </a:spcBef>
-        <a:buFont typeface="Arial"/>
+        <a:buFont typeface="Arial" panose="020B0604020202020204"/>
         <a:buChar char="»"/>
         <a:defRPr sz="2000" kern="1200">
           <a:solidFill>
@@ -2922,7 +2857,7 @@
         <a:spcBef>
           <a:spcPct val="20000"/>
         </a:spcBef>
-        <a:buFont typeface="Arial"/>
+        <a:buFont typeface="Arial" panose="020B0604020202020204"/>
         <a:buChar char="•"/>
         <a:defRPr sz="2000" kern="1200">
           <a:solidFill>
@@ -2937,7 +2872,7 @@
         <a:spcBef>
           <a:spcPct val="20000"/>
         </a:spcBef>
-        <a:buFont typeface="Arial"/>
+        <a:buFont typeface="Arial" panose="020B0604020202020204"/>
         <a:buChar char="•"/>
         <a:defRPr sz="2000" kern="1200">
           <a:solidFill>
@@ -2952,7 +2887,7 @@
         <a:spcBef>
           <a:spcPct val="20000"/>
         </a:spcBef>
-        <a:buFont typeface="Arial"/>
+        <a:buFont typeface="Arial" panose="020B0604020202020204"/>
         <a:buChar char="•"/>
         <a:defRPr sz="2000" kern="1200">
           <a:solidFill>
@@ -2967,7 +2902,7 @@
         <a:spcBef>
           <a:spcPct val="20000"/>
         </a:spcBef>
-        <a:buFont typeface="Arial"/>
+        <a:buFont typeface="Arial" panose="020B0604020202020204"/>
         <a:buChar char="•"/>
         <a:defRPr sz="2000" kern="1200">
           <a:solidFill>
@@ -3079,7 +3014,7 @@
 </file>
 
 <file path=ppt/slides/slide1.xml><?xml version="1.0" encoding="utf-8"?>
-<p:sld xmlns:a="http://schemas.openxmlformats.org/drawingml/2006/main" xmlns:p="http://schemas.openxmlformats.org/presentationml/2006/main" xmlns:r="http://schemas.openxmlformats.org/officeDocument/2006/relationships">
+<p:sld xmlns:a="http://schemas.openxmlformats.org/drawingml/2006/main" xmlns:r="http://schemas.openxmlformats.org/officeDocument/2006/relationships" xmlns:p="http://schemas.openxmlformats.org/presentationml/2006/main">
   <p:cSld>
     <p:spTree>
       <p:nvGrpSpPr>
@@ -3087,1192 +3022,2600 @@
         <p:cNvGrpSpPr/>
         <p:nvPr/>
       </p:nvGrpSpPr>
-      <p:grpSpPr/>
-      <p:cxnSp>
-        <p:nvCxnSpPr>
-          <p:cNvPr id="0" name=""/>
-          <p:cNvCxnSpPr/>
+      <p:grpSpPr>
+        <a:xfrm>
+          <a:off x="0" y="0"/>
+          <a:ext cx="0" cy="0"/>
+          <a:chOff x="0" y="0"/>
+          <a:chExt cx="0" cy="0"/>
+        </a:xfrm>
+      </p:grpSpPr>
+      <p:grpSp>
+        <p:nvGrpSpPr>
+          <p:cNvPr id="86" name="组合 85">
+            <a:extLst>
+              <a:ext uri="{FF2B5EF4-FFF2-40B4-BE49-F238E27FC236}">
+                <a16:creationId xmlns:a16="http://schemas.microsoft.com/office/drawing/2014/main" id="{2D52E5A5-B35D-59E4-5598-EC45CD506AD3}"/>
+              </a:ext>
+            </a:extLst>
+          </p:cNvPr>
+          <p:cNvGrpSpPr/>
           <p:nvPr/>
-        </p:nvCxnSpPr>
-        <p:spPr>
-          <a:xfrm flipH="0" flipV="0">
-            <a:off x="914400" y="5669280"/>
-            <a:ext cx="6858000" cy="914"/>
+        </p:nvGrpSpPr>
+        <p:grpSpPr>
+          <a:xfrm>
+            <a:off x="425239" y="264695"/>
+            <a:ext cx="2391710" cy="2334127"/>
+            <a:chOff x="425239" y="264695"/>
+            <a:chExt cx="2391710" cy="2334127"/>
           </a:xfrm>
-          <a:prstGeom prst="line">
-            <a:avLst/>
-          </a:prstGeom>
-          <a:ln w="25400">
-            <a:solidFill>
-              <a:srgbClr val="000000"/>
-            </a:solidFill>
-            <a:tailEnd type="arrow" w="med" len="med"/>
-          </a:ln>
-        </p:spPr>
-      </p:cxnSp>
-      <p:cxnSp>
-        <p:nvCxnSpPr>
-          <p:cNvPr id="0" name=""/>
-          <p:cNvCxnSpPr/>
-          <p:nvPr/>
-        </p:nvCxnSpPr>
-        <p:spPr>
-          <a:xfrm flipH="0" flipV="1">
-            <a:off x="914400" y="731520"/>
-            <a:ext cx="914" cy="4937760"/>
-          </a:xfrm>
-          <a:prstGeom prst="line">
-            <a:avLst/>
-          </a:prstGeom>
-          <a:ln w="25400">
-            <a:solidFill>
-              <a:srgbClr val="000000"/>
-            </a:solidFill>
-            <a:tailEnd type="arrow" w="med" len="med"/>
-          </a:ln>
-        </p:spPr>
-      </p:cxnSp>
-      <p:sp>
-        <p:nvSpPr>
-          <p:cNvPr id="2" name="TextBox 1"/>
-          <p:cNvSpPr txBox="1"/>
-          <p:nvPr/>
-        </p:nvSpPr>
-        <p:spPr>
-          <a:xfrm>
-            <a:off x="7680959" y="5532120"/>
-            <a:ext cx="548640" cy="365760"/>
-          </a:xfrm>
-          <a:prstGeom prst="rect">
-            <a:avLst/>
-          </a:prstGeom>
-          <a:noFill/>
-        </p:spPr>
-        <p:txBody>
-          <a:bodyPr wrap="none">
-            <a:spAutoFit/>
-          </a:bodyPr>
-          <a:lstStyle/>
-          <a:p>
-            <a:pPr algn="ctr"/>
-            <a:r>
-              <a:rPr sz="1800" b="1" i="1">
+        </p:grpSpPr>
+        <p:grpSp>
+          <p:nvGrpSpPr>
+            <p:cNvPr id="83" name="组合 82">
+              <a:extLst>
+                <a:ext uri="{FF2B5EF4-FFF2-40B4-BE49-F238E27FC236}">
+                  <a16:creationId xmlns:a16="http://schemas.microsoft.com/office/drawing/2014/main" id="{1DB565BA-FC73-751A-9539-F6375057874F}"/>
+                </a:ext>
+              </a:extLst>
+            </p:cNvPr>
+            <p:cNvGrpSpPr/>
+            <p:nvPr/>
+          </p:nvGrpSpPr>
+          <p:grpSpPr>
+            <a:xfrm>
+              <a:off x="748442" y="480950"/>
+              <a:ext cx="2068507" cy="2117872"/>
+              <a:chOff x="748441" y="480949"/>
+              <a:chExt cx="3286793" cy="3320792"/>
+            </a:xfrm>
+          </p:grpSpPr>
+          <p:grpSp>
+            <p:nvGrpSpPr>
+              <p:cNvPr id="65" name="组合 64">
+                <a:extLst>
+                  <a:ext uri="{FF2B5EF4-FFF2-40B4-BE49-F238E27FC236}">
+                    <a16:creationId xmlns:a16="http://schemas.microsoft.com/office/drawing/2014/main" id="{DB7F5F50-6E65-C6DA-4202-86F1DE226287}"/>
+                  </a:ext>
+                </a:extLst>
+              </p:cNvPr>
+              <p:cNvGrpSpPr/>
+              <p:nvPr/>
+            </p:nvGrpSpPr>
+            <p:grpSpPr>
+              <a:xfrm>
+                <a:off x="748441" y="480949"/>
+                <a:ext cx="3286793" cy="3320792"/>
+                <a:chOff x="748441" y="480949"/>
+                <a:chExt cx="3286793" cy="3320792"/>
+              </a:xfrm>
+            </p:grpSpPr>
+            <p:sp>
+              <p:nvSpPr>
+                <p:cNvPr id="5" name="任意多边形: 形状 4">
+                  <a:extLst>
+                    <a:ext uri="{FF2B5EF4-FFF2-40B4-BE49-F238E27FC236}">
+                      <a16:creationId xmlns:a16="http://schemas.microsoft.com/office/drawing/2014/main" id="{15BFA6E0-BF5F-4FB0-DD08-C69E34AB4AD8}"/>
+                    </a:ext>
+                  </a:extLst>
+                </p:cNvPr>
+                <p:cNvSpPr/>
+                <p:nvPr/>
+              </p:nvSpPr>
+              <p:spPr>
+                <a:xfrm>
+                  <a:off x="748441" y="480949"/>
+                  <a:ext cx="3286793" cy="3320792"/>
+                </a:xfrm>
+                <a:custGeom>
+                  <a:avLst/>
+                  <a:gdLst>
+                    <a:gd name="csX0" fmla="*/ 0 w 3286793"/>
+                    <a:gd name="csY0" fmla="*/ 3320792 h 3320792"/>
+                    <a:gd name="csX1" fmla="*/ 3286794 w 3286793"/>
+                    <a:gd name="csY1" fmla="*/ 3320792 h 3320792"/>
+                    <a:gd name="csX2" fmla="*/ 3286794 w 3286793"/>
+                    <a:gd name="csY2" fmla="*/ 0 h 3320792"/>
+                    <a:gd name="csX3" fmla="*/ 0 w 3286793"/>
+                    <a:gd name="csY3" fmla="*/ 0 h 3320792"/>
+                    <a:gd name="csX4" fmla="*/ 0 w 3286793"/>
+                    <a:gd name="csY4" fmla="*/ 3320792 h 3320792"/>
+                  </a:gdLst>
+                  <a:ahLst/>
+                  <a:cxnLst>
+                    <a:cxn ang="0">
+                      <a:pos x="csX0" y="csY0"/>
+                    </a:cxn>
+                    <a:cxn ang="0">
+                      <a:pos x="csX1" y="csY1"/>
+                    </a:cxn>
+                    <a:cxn ang="0">
+                      <a:pos x="csX2" y="csY2"/>
+                    </a:cxn>
+                    <a:cxn ang="0">
+                      <a:pos x="csX3" y="csY3"/>
+                    </a:cxn>
+                    <a:cxn ang="0">
+                      <a:pos x="csX4" y="csY4"/>
+                    </a:cxn>
+                  </a:cxnLst>
+                  <a:rect l="l" t="t" r="r" b="b"/>
+                  <a:pathLst>
+                    <a:path w="3286793" h="3320792">
+                      <a:moveTo>
+                        <a:pt x="0" y="3320792"/>
+                      </a:moveTo>
+                      <a:lnTo>
+                        <a:pt x="3286794" y="3320792"/>
+                      </a:lnTo>
+                      <a:lnTo>
+                        <a:pt x="3286794" y="0"/>
+                      </a:lnTo>
+                      <a:lnTo>
+                        <a:pt x="0" y="0"/>
+                      </a:lnTo>
+                      <a:lnTo>
+                        <a:pt x="0" y="3320792"/>
+                      </a:lnTo>
+                      <a:close/>
+                    </a:path>
+                  </a:pathLst>
+                </a:custGeom>
+                <a:noFill/>
+                <a:ln w="7113" cap="flat">
+                  <a:noFill/>
+                  <a:prstDash val="solid"/>
+                  <a:round/>
+                </a:ln>
+              </p:spPr>
+              <p:txBody>
+                <a:bodyPr/>
+                <a:lstStyle/>
+                <a:p>
+                  <a:endParaRPr lang="zh-CN" altLang="en-US"/>
+                </a:p>
+              </p:txBody>
+            </p:sp>
+            <p:sp>
+              <p:nvSpPr>
+                <p:cNvPr id="14" name="任意多边形: 形状 13">
+                  <a:extLst>
+                    <a:ext uri="{FF2B5EF4-FFF2-40B4-BE49-F238E27FC236}">
+                      <a16:creationId xmlns:a16="http://schemas.microsoft.com/office/drawing/2014/main" id="{26F43A60-A7BC-ED07-F975-572F5A59BEEE}"/>
+                    </a:ext>
+                  </a:extLst>
+                </p:cNvPr>
+                <p:cNvSpPr/>
+                <p:nvPr/>
+              </p:nvSpPr>
+              <p:spPr>
+                <a:xfrm>
+                  <a:off x="1139255" y="1738157"/>
+                  <a:ext cx="444274" cy="635170"/>
+                </a:xfrm>
+                <a:custGeom>
+                  <a:avLst/>
+                  <a:gdLst>
+                    <a:gd name="csX0" fmla="*/ 444274 w 444274"/>
+                    <a:gd name="csY0" fmla="*/ 635170 h 635170"/>
+                    <a:gd name="csX1" fmla="*/ 0 w 444274"/>
+                    <a:gd name="csY1" fmla="*/ 0 h 635170"/>
+                  </a:gdLst>
+                  <a:ahLst/>
+                  <a:cxnLst>
+                    <a:cxn ang="0">
+                      <a:pos x="csX0" y="csY0"/>
+                    </a:cxn>
+                    <a:cxn ang="0">
+                      <a:pos x="csX1" y="csY1"/>
+                    </a:cxn>
+                  </a:cxnLst>
+                  <a:rect l="l" t="t" r="r" b="b"/>
+                  <a:pathLst>
+                    <a:path w="444274" h="635170">
+                      <a:moveTo>
+                        <a:pt x="444274" y="635170"/>
+                      </a:moveTo>
+                      <a:lnTo>
+                        <a:pt x="0" y="0"/>
+                      </a:lnTo>
+                    </a:path>
+                  </a:pathLst>
+                </a:custGeom>
+                <a:noFill/>
+                <a:ln w="10669" cap="flat">
+                  <a:solidFill>
+                    <a:srgbClr val="7F8C8D"/>
+                  </a:solidFill>
+                  <a:custDash>
+                    <a:ds d="112500" sp="185625"/>
+                  </a:custDash>
+                  <a:round/>
+                </a:ln>
+              </p:spPr>
+              <p:txBody>
+                <a:bodyPr/>
+                <a:lstStyle/>
+                <a:p>
+                  <a:endParaRPr lang="zh-CN" altLang="en-US">
+                    <a:latin typeface="Times New Roman" panose="02020603050405020304" pitchFamily="18" charset="0"/>
+                    <a:cs typeface="Times New Roman" panose="02020603050405020304" pitchFamily="18" charset="0"/>
+                  </a:endParaRPr>
+                </a:p>
+              </p:txBody>
+            </p:sp>
+            <p:sp>
+              <p:nvSpPr>
+                <p:cNvPr id="15" name="任意多边形: 形状 14">
+                  <a:extLst>
+                    <a:ext uri="{FF2B5EF4-FFF2-40B4-BE49-F238E27FC236}">
+                      <a16:creationId xmlns:a16="http://schemas.microsoft.com/office/drawing/2014/main" id="{C696EE2E-CACE-2BC6-8453-338E32F24EC0}"/>
+                    </a:ext>
+                  </a:extLst>
+                </p:cNvPr>
+                <p:cNvSpPr/>
+                <p:nvPr/>
+              </p:nvSpPr>
+              <p:spPr>
+                <a:xfrm>
+                  <a:off x="2079239" y="1079266"/>
+                  <a:ext cx="444274" cy="635170"/>
+                </a:xfrm>
+                <a:custGeom>
+                  <a:avLst/>
+                  <a:gdLst>
+                    <a:gd name="csX0" fmla="*/ 444274 w 444274"/>
+                    <a:gd name="csY0" fmla="*/ 635170 h 635170"/>
+                    <a:gd name="csX1" fmla="*/ 0 w 444274"/>
+                    <a:gd name="csY1" fmla="*/ 0 h 635170"/>
+                  </a:gdLst>
+                  <a:ahLst/>
+                  <a:cxnLst>
+                    <a:cxn ang="0">
+                      <a:pos x="csX0" y="csY0"/>
+                    </a:cxn>
+                    <a:cxn ang="0">
+                      <a:pos x="csX1" y="csY1"/>
+                    </a:cxn>
+                  </a:cxnLst>
+                  <a:rect l="l" t="t" r="r" b="b"/>
+                  <a:pathLst>
+                    <a:path w="444274" h="635170">
+                      <a:moveTo>
+                        <a:pt x="444274" y="635170"/>
+                      </a:moveTo>
+                      <a:lnTo>
+                        <a:pt x="0" y="0"/>
+                      </a:lnTo>
+                    </a:path>
+                  </a:pathLst>
+                </a:custGeom>
+                <a:noFill/>
+                <a:ln w="10669" cap="flat">
+                  <a:solidFill>
+                    <a:srgbClr val="7F8C8D"/>
+                  </a:solidFill>
+                  <a:custDash>
+                    <a:ds d="112500" sp="185625"/>
+                  </a:custDash>
+                  <a:round/>
+                </a:ln>
+              </p:spPr>
+              <p:txBody>
+                <a:bodyPr/>
+                <a:lstStyle/>
+                <a:p>
+                  <a:endParaRPr lang="zh-CN" altLang="en-US">
+                    <a:latin typeface="Times New Roman" panose="02020603050405020304" pitchFamily="18" charset="0"/>
+                    <a:cs typeface="Times New Roman" panose="02020603050405020304" pitchFamily="18" charset="0"/>
+                  </a:endParaRPr>
+                </a:p>
+              </p:txBody>
+            </p:sp>
+            <p:sp>
+              <p:nvSpPr>
+                <p:cNvPr id="16" name="任意多边形: 形状 15">
+                  <a:extLst>
+                    <a:ext uri="{FF2B5EF4-FFF2-40B4-BE49-F238E27FC236}">
+                      <a16:creationId xmlns:a16="http://schemas.microsoft.com/office/drawing/2014/main" id="{E26383CC-30D6-BB91-6B6C-24813A1CFF6E}"/>
+                    </a:ext>
+                  </a:extLst>
+                </p:cNvPr>
+                <p:cNvSpPr/>
+                <p:nvPr/>
+              </p:nvSpPr>
+              <p:spPr>
+                <a:xfrm>
+                  <a:off x="1583529" y="1714437"/>
+                  <a:ext cx="939984" cy="658890"/>
+                </a:xfrm>
+                <a:custGeom>
+                  <a:avLst/>
+                  <a:gdLst>
+                    <a:gd name="csX0" fmla="*/ 0 w 939984"/>
+                    <a:gd name="csY0" fmla="*/ 658890 h 658890"/>
+                    <a:gd name="csX1" fmla="*/ 939984 w 939984"/>
+                    <a:gd name="csY1" fmla="*/ 0 h 658890"/>
+                  </a:gdLst>
+                  <a:ahLst/>
+                  <a:cxnLst>
+                    <a:cxn ang="0">
+                      <a:pos x="csX0" y="csY0"/>
+                    </a:cxn>
+                    <a:cxn ang="0">
+                      <a:pos x="csX1" y="csY1"/>
+                    </a:cxn>
+                  </a:cxnLst>
+                  <a:rect l="l" t="t" r="r" b="b"/>
+                  <a:pathLst>
+                    <a:path w="939984" h="658890">
+                      <a:moveTo>
+                        <a:pt x="0" y="658890"/>
+                      </a:moveTo>
+                      <a:lnTo>
+                        <a:pt x="939984" y="0"/>
+                      </a:lnTo>
+                    </a:path>
+                  </a:pathLst>
+                </a:custGeom>
+                <a:noFill/>
+                <a:ln w="14226" cap="sq">
+                  <a:solidFill>
+                    <a:srgbClr val="7F8C8D"/>
+                  </a:solidFill>
+                  <a:prstDash val="solid"/>
+                  <a:round/>
+                </a:ln>
+              </p:spPr>
+              <p:txBody>
+                <a:bodyPr/>
+                <a:lstStyle/>
+                <a:p>
+                  <a:endParaRPr lang="zh-CN" altLang="en-US">
+                    <a:latin typeface="Times New Roman" panose="02020603050405020304" pitchFamily="18" charset="0"/>
+                    <a:cs typeface="Times New Roman" panose="02020603050405020304" pitchFamily="18" charset="0"/>
+                  </a:endParaRPr>
+                </a:p>
+              </p:txBody>
+            </p:sp>
+            <p:sp>
+              <p:nvSpPr>
+                <p:cNvPr id="17" name="任意多边形: 形状 16">
+                  <a:extLst>
+                    <a:ext uri="{FF2B5EF4-FFF2-40B4-BE49-F238E27FC236}">
+                      <a16:creationId xmlns:a16="http://schemas.microsoft.com/office/drawing/2014/main" id="{A33B70F7-4E06-951E-5D0E-62A8B14A5CB3}"/>
+                    </a:ext>
+                  </a:extLst>
+                </p:cNvPr>
+                <p:cNvSpPr/>
+                <p:nvPr/>
+              </p:nvSpPr>
+              <p:spPr>
+                <a:xfrm>
+                  <a:off x="1320256" y="1996930"/>
+                  <a:ext cx="526547" cy="752794"/>
+                </a:xfrm>
+                <a:custGeom>
+                  <a:avLst/>
+                  <a:gdLst>
+                    <a:gd name="csX0" fmla="*/ 526547 w 526547"/>
+                    <a:gd name="csY0" fmla="*/ 752794 h 752794"/>
+                    <a:gd name="csX1" fmla="*/ 0 w 526547"/>
+                    <a:gd name="csY1" fmla="*/ 0 h 752794"/>
+                  </a:gdLst>
+                  <a:ahLst/>
+                  <a:cxnLst>
+                    <a:cxn ang="0">
+                      <a:pos x="csX0" y="csY0"/>
+                    </a:cxn>
+                    <a:cxn ang="0">
+                      <a:pos x="csX1" y="csY1"/>
+                    </a:cxn>
+                  </a:cxnLst>
+                  <a:rect l="l" t="t" r="r" b="b"/>
+                  <a:pathLst>
+                    <a:path w="526547" h="752794">
+                      <a:moveTo>
+                        <a:pt x="526547" y="752794"/>
+                      </a:moveTo>
+                      <a:lnTo>
+                        <a:pt x="0" y="0"/>
+                      </a:lnTo>
+                    </a:path>
+                  </a:pathLst>
+                </a:custGeom>
+                <a:noFill/>
+                <a:ln w="28451" cap="rnd">
+                  <a:solidFill>
+                    <a:srgbClr val="34495E"/>
+                  </a:solidFill>
+                  <a:prstDash val="solid"/>
+                  <a:round/>
+                </a:ln>
+              </p:spPr>
+              <p:txBody>
+                <a:bodyPr/>
+                <a:lstStyle/>
+                <a:p>
+                  <a:endParaRPr lang="zh-CN" altLang="en-US">
+                    <a:latin typeface="Times New Roman" panose="02020603050405020304" pitchFamily="18" charset="0"/>
+                    <a:cs typeface="Times New Roman" panose="02020603050405020304" pitchFamily="18" charset="0"/>
+                  </a:endParaRPr>
+                </a:p>
+              </p:txBody>
+            </p:sp>
+            <p:sp>
+              <p:nvSpPr>
+                <p:cNvPr id="18" name="任意多边形: 形状 17">
+                  <a:extLst>
+                    <a:ext uri="{FF2B5EF4-FFF2-40B4-BE49-F238E27FC236}">
+                      <a16:creationId xmlns:a16="http://schemas.microsoft.com/office/drawing/2014/main" id="{F0877913-5987-973A-C467-07C3FB2F30CE}"/>
+                    </a:ext>
+                  </a:extLst>
+                </p:cNvPr>
+                <p:cNvSpPr/>
+                <p:nvPr/>
+              </p:nvSpPr>
+              <p:spPr>
+                <a:xfrm>
+                  <a:off x="2260240" y="1338040"/>
+                  <a:ext cx="526547" cy="752794"/>
+                </a:xfrm>
+                <a:custGeom>
+                  <a:avLst/>
+                  <a:gdLst>
+                    <a:gd name="csX0" fmla="*/ 526547 w 526547"/>
+                    <a:gd name="csY0" fmla="*/ 752794 h 752794"/>
+                    <a:gd name="csX1" fmla="*/ 0 w 526547"/>
+                    <a:gd name="csY1" fmla="*/ 0 h 752794"/>
+                  </a:gdLst>
+                  <a:ahLst/>
+                  <a:cxnLst>
+                    <a:cxn ang="0">
+                      <a:pos x="csX0" y="csY0"/>
+                    </a:cxn>
+                    <a:cxn ang="0">
+                      <a:pos x="csX1" y="csY1"/>
+                    </a:cxn>
+                  </a:cxnLst>
+                  <a:rect l="l" t="t" r="r" b="b"/>
+                  <a:pathLst>
+                    <a:path w="526547" h="752794">
+                      <a:moveTo>
+                        <a:pt x="526547" y="752794"/>
+                      </a:moveTo>
+                      <a:lnTo>
+                        <a:pt x="0" y="0"/>
+                      </a:lnTo>
+                    </a:path>
+                  </a:pathLst>
+                </a:custGeom>
+                <a:noFill/>
+                <a:ln w="28451" cap="rnd">
+                  <a:solidFill>
+                    <a:srgbClr val="34495E"/>
+                  </a:solidFill>
+                  <a:prstDash val="solid"/>
+                  <a:round/>
+                </a:ln>
+              </p:spPr>
+              <p:txBody>
+                <a:bodyPr/>
+                <a:lstStyle/>
+                <a:p>
+                  <a:endParaRPr lang="zh-CN" altLang="en-US">
+                    <a:latin typeface="Times New Roman" panose="02020603050405020304" pitchFamily="18" charset="0"/>
+                    <a:cs typeface="Times New Roman" panose="02020603050405020304" pitchFamily="18" charset="0"/>
+                  </a:endParaRPr>
+                </a:p>
+              </p:txBody>
+            </p:sp>
+            <p:grpSp>
+              <p:nvGrpSpPr>
+                <p:cNvPr id="23" name="图形 2">
+                  <a:extLst>
+                    <a:ext uri="{FF2B5EF4-FFF2-40B4-BE49-F238E27FC236}">
+                      <a16:creationId xmlns:a16="http://schemas.microsoft.com/office/drawing/2014/main" id="{9BC0A4DB-CB93-B1C4-072A-B9B2045E1448}"/>
+                    </a:ext>
+                  </a:extLst>
+                </p:cNvPr>
+                <p:cNvGrpSpPr/>
+                <p:nvPr/>
+              </p:nvGrpSpPr>
+              <p:grpSpPr>
+                <a:xfrm>
+                  <a:off x="1581334" y="1894193"/>
+                  <a:ext cx="685734" cy="484898"/>
+                  <a:chOff x="2269504" y="2063394"/>
+                  <a:chExt cx="389900" cy="273304"/>
+                </a:xfrm>
+              </p:grpSpPr>
+              <p:sp>
+                <p:nvSpPr>
+                  <p:cNvPr id="24" name="任意多边形: 形状 23">
+                    <a:extLst>
+                      <a:ext uri="{FF2B5EF4-FFF2-40B4-BE49-F238E27FC236}">
+                        <a16:creationId xmlns:a16="http://schemas.microsoft.com/office/drawing/2014/main" id="{5D7110D1-C4D4-7D54-798A-F8039DC604C4}"/>
+                      </a:ext>
+                    </a:extLst>
+                  </p:cNvPr>
+                  <p:cNvSpPr/>
+                  <p:nvPr/>
+                </p:nvSpPr>
+                <p:spPr>
+                  <a:xfrm>
+                    <a:off x="2269504" y="2063394"/>
+                    <a:ext cx="389900" cy="273304"/>
+                  </a:xfrm>
+                  <a:custGeom>
+                    <a:avLst/>
+                    <a:gdLst>
+                      <a:gd name="csX0" fmla="*/ 0 w 389900"/>
+                      <a:gd name="csY0" fmla="*/ 273304 h 273304"/>
+                      <a:gd name="csX1" fmla="*/ 389900 w 389900"/>
+                      <a:gd name="csY1" fmla="*/ 0 h 273304"/>
+                    </a:gdLst>
+                    <a:ahLst/>
+                    <a:cxnLst>
+                      <a:cxn ang="0">
+                        <a:pos x="csX0" y="csY0"/>
+                      </a:cxn>
+                      <a:cxn ang="0">
+                        <a:pos x="csX1" y="csY1"/>
+                      </a:cxn>
+                    </a:cxnLst>
+                    <a:rect l="l" t="t" r="r" b="b"/>
+                    <a:pathLst>
+                      <a:path w="389900" h="273304">
+                        <a:moveTo>
+                          <a:pt x="0" y="273304"/>
+                        </a:moveTo>
+                        <a:cubicBezTo>
+                          <a:pt x="133225" y="179919"/>
+                          <a:pt x="263192" y="88818"/>
+                          <a:pt x="389900" y="0"/>
+                        </a:cubicBezTo>
+                      </a:path>
+                    </a:pathLst>
+                  </a:custGeom>
+                  <a:noFill/>
+                  <a:ln w="10669" cap="rnd">
+                    <a:solidFill>
+                      <a:srgbClr val="2980B9"/>
+                    </a:solidFill>
+                    <a:prstDash val="solid"/>
+                    <a:round/>
+                  </a:ln>
+                </p:spPr>
+                <p:txBody>
+                  <a:bodyPr/>
+                  <a:lstStyle/>
+                  <a:p>
+                    <a:endParaRPr lang="zh-CN" altLang="en-US">
+                      <a:latin typeface="Times New Roman" panose="02020603050405020304" pitchFamily="18" charset="0"/>
+                      <a:cs typeface="Times New Roman" panose="02020603050405020304" pitchFamily="18" charset="0"/>
+                    </a:endParaRPr>
+                  </a:p>
+                </p:txBody>
+              </p:sp>
+              <p:sp>
+                <p:nvSpPr>
+                  <p:cNvPr id="25" name="任意多边形: 形状 24">
+                    <a:extLst>
+                      <a:ext uri="{FF2B5EF4-FFF2-40B4-BE49-F238E27FC236}">
+                        <a16:creationId xmlns:a16="http://schemas.microsoft.com/office/drawing/2014/main" id="{42E11305-2574-7824-17D3-9376E073CA57}"/>
+                      </a:ext>
+                    </a:extLst>
+                  </p:cNvPr>
+                  <p:cNvSpPr/>
+                  <p:nvPr/>
+                </p:nvSpPr>
+                <p:spPr>
+                  <a:xfrm>
+                    <a:off x="2621634" y="2063394"/>
+                    <a:ext cx="37770" cy="33612"/>
+                  </a:xfrm>
+                  <a:custGeom>
+                    <a:avLst/>
+                    <a:gdLst>
+                      <a:gd name="csX0" fmla="*/ 0 w 37770"/>
+                      <a:gd name="csY0" fmla="*/ 5607 h 33612"/>
+                      <a:gd name="csX1" fmla="*/ 37770 w 37770"/>
+                      <a:gd name="csY1" fmla="*/ 0 h 33612"/>
+                      <a:gd name="csX2" fmla="*/ 19589 w 37770"/>
+                      <a:gd name="csY2" fmla="*/ 33613 h 33612"/>
+                    </a:gdLst>
+                    <a:ahLst/>
+                    <a:cxnLst>
+                      <a:cxn ang="0">
+                        <a:pos x="csX0" y="csY0"/>
+                      </a:cxn>
+                      <a:cxn ang="0">
+                        <a:pos x="csX1" y="csY1"/>
+                      </a:cxn>
+                      <a:cxn ang="0">
+                        <a:pos x="csX2" y="csY2"/>
+                      </a:cxn>
+                    </a:cxnLst>
+                    <a:rect l="l" t="t" r="r" b="b"/>
+                    <a:pathLst>
+                      <a:path w="37770" h="33612">
+                        <a:moveTo>
+                          <a:pt x="0" y="5607"/>
+                        </a:moveTo>
+                        <a:lnTo>
+                          <a:pt x="37770" y="0"/>
+                        </a:lnTo>
+                        <a:lnTo>
+                          <a:pt x="19589" y="33613"/>
+                        </a:lnTo>
+                        <a:close/>
+                      </a:path>
+                    </a:pathLst>
+                  </a:custGeom>
+                  <a:solidFill>
+                    <a:srgbClr val="2980B9"/>
+                  </a:solidFill>
+                  <a:ln w="10669" cap="rnd">
+                    <a:solidFill>
+                      <a:srgbClr val="2980B9"/>
+                    </a:solidFill>
+                    <a:prstDash val="solid"/>
+                    <a:round/>
+                  </a:ln>
+                </p:spPr>
+                <p:txBody>
+                  <a:bodyPr/>
+                  <a:lstStyle/>
+                  <a:p>
+                    <a:endParaRPr lang="zh-CN" altLang="en-US">
+                      <a:latin typeface="Times New Roman" panose="02020603050405020304" pitchFamily="18" charset="0"/>
+                      <a:cs typeface="Times New Roman" panose="02020603050405020304" pitchFamily="18" charset="0"/>
+                    </a:endParaRPr>
+                  </a:p>
+                </p:txBody>
+              </p:sp>
+            </p:grpSp>
+            <p:grpSp>
+              <p:nvGrpSpPr>
+                <p:cNvPr id="26" name="图形 2">
+                  <a:extLst>
+                    <a:ext uri="{FF2B5EF4-FFF2-40B4-BE49-F238E27FC236}">
+                      <a16:creationId xmlns:a16="http://schemas.microsoft.com/office/drawing/2014/main" id="{E2A3E5E3-DAB4-B136-93CF-7B1B2C8097A9}"/>
+                    </a:ext>
+                  </a:extLst>
+                </p:cNvPr>
+                <p:cNvGrpSpPr/>
+                <p:nvPr/>
+              </p:nvGrpSpPr>
+              <p:grpSpPr>
+                <a:xfrm>
+                  <a:off x="1583529" y="2356232"/>
+                  <a:ext cx="977915" cy="45719"/>
+                  <a:chOff x="2276991" y="2525433"/>
+                  <a:chExt cx="676789" cy="34188"/>
+                </a:xfrm>
+              </p:grpSpPr>
+              <p:sp>
+                <p:nvSpPr>
+                  <p:cNvPr id="27" name="任意多边形: 形状 26">
+                    <a:extLst>
+                      <a:ext uri="{FF2B5EF4-FFF2-40B4-BE49-F238E27FC236}">
+                        <a16:creationId xmlns:a16="http://schemas.microsoft.com/office/drawing/2014/main" id="{781E7FC1-43B6-77A5-3839-98CAEA67AC2E}"/>
+                      </a:ext>
+                    </a:extLst>
+                  </p:cNvPr>
+                  <p:cNvSpPr/>
+                  <p:nvPr/>
+                </p:nvSpPr>
+                <p:spPr>
+                  <a:xfrm>
+                    <a:off x="2276991" y="2542527"/>
+                    <a:ext cx="676789" cy="7122"/>
+                  </a:xfrm>
+                  <a:custGeom>
+                    <a:avLst/>
+                    <a:gdLst>
+                      <a:gd name="csX0" fmla="*/ 0 w 676789"/>
+                      <a:gd name="csY0" fmla="*/ 0 h 7122"/>
+                      <a:gd name="csX1" fmla="*/ 676790 w 676789"/>
+                      <a:gd name="csY1" fmla="*/ 0 h 7122"/>
+                    </a:gdLst>
+                    <a:ahLst/>
+                    <a:cxnLst>
+                      <a:cxn ang="0">
+                        <a:pos x="csX0" y="csY0"/>
+                      </a:cxn>
+                      <a:cxn ang="0">
+                        <a:pos x="csX1" y="csY1"/>
+                      </a:cxn>
+                    </a:cxnLst>
+                    <a:rect l="l" t="t" r="r" b="b"/>
+                    <a:pathLst>
+                      <a:path w="676789" h="7122">
+                        <a:moveTo>
+                          <a:pt x="0" y="0"/>
+                        </a:moveTo>
+                        <a:cubicBezTo>
+                          <a:pt x="229574" y="0"/>
+                          <a:pt x="455170" y="0"/>
+                          <a:pt x="676790" y="0"/>
+                        </a:cubicBezTo>
+                      </a:path>
+                    </a:pathLst>
+                  </a:custGeom>
+                  <a:noFill/>
+                  <a:ln w="10669" cap="rnd">
+                    <a:solidFill>
+                      <a:srgbClr val="2980B9"/>
+                    </a:solidFill>
+                    <a:prstDash val="solid"/>
+                    <a:round/>
+                  </a:ln>
+                </p:spPr>
+                <p:txBody>
+                  <a:bodyPr/>
+                  <a:lstStyle/>
+                  <a:p>
+                    <a:endParaRPr lang="zh-CN" altLang="en-US">
+                      <a:latin typeface="Times New Roman" panose="02020603050405020304" pitchFamily="18" charset="0"/>
+                      <a:cs typeface="Times New Roman" panose="02020603050405020304" pitchFamily="18" charset="0"/>
+                    </a:endParaRPr>
+                  </a:p>
+                </p:txBody>
+              </p:sp>
+              <p:sp>
+                <p:nvSpPr>
+                  <p:cNvPr id="28" name="任意多边形: 形状 27">
+                    <a:extLst>
+                      <a:ext uri="{FF2B5EF4-FFF2-40B4-BE49-F238E27FC236}">
+                        <a16:creationId xmlns:a16="http://schemas.microsoft.com/office/drawing/2014/main" id="{EC60821B-C5BA-CBFB-CFFD-59FD5FEF5438}"/>
+                      </a:ext>
+                    </a:extLst>
+                  </p:cNvPr>
+                  <p:cNvSpPr/>
+                  <p:nvPr/>
+                </p:nvSpPr>
+                <p:spPr>
+                  <a:xfrm>
+                    <a:off x="2919629" y="2525433"/>
+                    <a:ext cx="34151" cy="34188"/>
+                  </a:xfrm>
+                  <a:custGeom>
+                    <a:avLst/>
+                    <a:gdLst>
+                      <a:gd name="csX0" fmla="*/ 0 w 34151"/>
+                      <a:gd name="csY0" fmla="*/ 0 h 34188"/>
+                      <a:gd name="csX1" fmla="*/ 34152 w 34151"/>
+                      <a:gd name="csY1" fmla="*/ 17094 h 34188"/>
+                      <a:gd name="csX2" fmla="*/ 0 w 34151"/>
+                      <a:gd name="csY2" fmla="*/ 34189 h 34188"/>
+                    </a:gdLst>
+                    <a:ahLst/>
+                    <a:cxnLst>
+                      <a:cxn ang="0">
+                        <a:pos x="csX0" y="csY0"/>
+                      </a:cxn>
+                      <a:cxn ang="0">
+                        <a:pos x="csX1" y="csY1"/>
+                      </a:cxn>
+                      <a:cxn ang="0">
+                        <a:pos x="csX2" y="csY2"/>
+                      </a:cxn>
+                    </a:cxnLst>
+                    <a:rect l="l" t="t" r="r" b="b"/>
+                    <a:pathLst>
+                      <a:path w="34151" h="34188">
+                        <a:moveTo>
+                          <a:pt x="0" y="0"/>
+                        </a:moveTo>
+                        <a:lnTo>
+                          <a:pt x="34152" y="17094"/>
+                        </a:lnTo>
+                        <a:lnTo>
+                          <a:pt x="0" y="34189"/>
+                        </a:lnTo>
+                        <a:close/>
+                      </a:path>
+                    </a:pathLst>
+                  </a:custGeom>
+                  <a:solidFill>
+                    <a:srgbClr val="2980B9"/>
+                  </a:solidFill>
+                  <a:ln w="10669" cap="rnd">
+                    <a:solidFill>
+                      <a:srgbClr val="2980B9"/>
+                    </a:solidFill>
+                    <a:prstDash val="solid"/>
+                    <a:round/>
+                  </a:ln>
+                </p:spPr>
+                <p:txBody>
+                  <a:bodyPr/>
+                  <a:lstStyle/>
+                  <a:p>
+                    <a:endParaRPr lang="zh-CN" altLang="en-US">
+                      <a:latin typeface="Times New Roman" panose="02020603050405020304" pitchFamily="18" charset="0"/>
+                      <a:cs typeface="Times New Roman" panose="02020603050405020304" pitchFamily="18" charset="0"/>
+                    </a:endParaRPr>
+                  </a:p>
+                </p:txBody>
+              </p:sp>
+            </p:grpSp>
+            <p:sp>
+              <p:nvSpPr>
+                <p:cNvPr id="29" name="任意多边形: 形状 28">
+                  <a:extLst>
+                    <a:ext uri="{FF2B5EF4-FFF2-40B4-BE49-F238E27FC236}">
+                      <a16:creationId xmlns:a16="http://schemas.microsoft.com/office/drawing/2014/main" id="{1626219B-62EE-A875-29FA-5327491074C4}"/>
+                    </a:ext>
+                  </a:extLst>
+                </p:cNvPr>
+                <p:cNvSpPr/>
+                <p:nvPr/>
+              </p:nvSpPr>
+              <p:spPr>
+                <a:xfrm>
+                  <a:off x="2053521" y="2043882"/>
+                  <a:ext cx="103762" cy="329445"/>
+                </a:xfrm>
+                <a:custGeom>
+                  <a:avLst/>
+                  <a:gdLst>
+                    <a:gd name="csX0" fmla="*/ 103762 w 103762"/>
+                    <a:gd name="csY0" fmla="*/ 329445 h 329445"/>
+                    <a:gd name="csX1" fmla="*/ 77207 w 103762"/>
+                    <a:gd name="csY1" fmla="*/ 156729 h 329445"/>
+                    <a:gd name="csX2" fmla="*/ 0 w 103762"/>
+                    <a:gd name="csY2" fmla="*/ 0 h 329445"/>
+                  </a:gdLst>
+                  <a:ahLst/>
+                  <a:cxnLst>
+                    <a:cxn ang="0">
+                      <a:pos x="csX0" y="csY0"/>
+                    </a:cxn>
+                    <a:cxn ang="0">
+                      <a:pos x="csX1" y="csY1"/>
+                    </a:cxn>
+                    <a:cxn ang="0">
+                      <a:pos x="csX2" y="csY2"/>
+                    </a:cxn>
+                  </a:cxnLst>
+                  <a:rect l="l" t="t" r="r" b="b"/>
+                  <a:pathLst>
+                    <a:path w="103762" h="329445">
+                      <a:moveTo>
+                        <a:pt x="103762" y="329445"/>
+                      </a:moveTo>
+                      <a:cubicBezTo>
+                        <a:pt x="103762" y="270855"/>
+                        <a:pt x="94807" y="212608"/>
+                        <a:pt x="77207" y="156729"/>
+                      </a:cubicBezTo>
+                      <a:cubicBezTo>
+                        <a:pt x="59608" y="100850"/>
+                        <a:pt x="33570" y="47995"/>
+                        <a:pt x="0" y="0"/>
+                      </a:cubicBezTo>
+                    </a:path>
+                  </a:pathLst>
+                </a:custGeom>
+                <a:noFill/>
+                <a:ln w="14226" cap="flat">
+                  <a:solidFill>
+                    <a:srgbClr val="2980B9"/>
+                  </a:solidFill>
+                  <a:prstDash val="solid"/>
+                  <a:miter/>
+                </a:ln>
+              </p:spPr>
+              <p:txBody>
+                <a:bodyPr/>
+                <a:lstStyle/>
+                <a:p>
+                  <a:endParaRPr lang="zh-CN" altLang="en-US">
+                    <a:latin typeface="Times New Roman" panose="02020603050405020304" pitchFamily="18" charset="0"/>
+                    <a:cs typeface="Times New Roman" panose="02020603050405020304" pitchFamily="18" charset="0"/>
+                  </a:endParaRPr>
+                </a:p>
+              </p:txBody>
+            </p:sp>
+            <p:sp>
+              <p:nvSpPr>
+                <p:cNvPr id="35" name="任意多边形: 形状 34">
+                  <a:extLst>
+                    <a:ext uri="{FF2B5EF4-FFF2-40B4-BE49-F238E27FC236}">
+                      <a16:creationId xmlns:a16="http://schemas.microsoft.com/office/drawing/2014/main" id="{76A81586-D474-A53B-984F-B5DFA627EFA6}"/>
+                    </a:ext>
+                  </a:extLst>
+                </p:cNvPr>
+                <p:cNvSpPr/>
+                <p:nvPr/>
+              </p:nvSpPr>
+              <p:spPr>
+                <a:xfrm>
+                  <a:off x="3051790" y="1317661"/>
+                  <a:ext cx="37770" cy="33612"/>
+                </a:xfrm>
+                <a:custGeom>
+                  <a:avLst/>
+                  <a:gdLst>
+                    <a:gd name="csX0" fmla="*/ 0 w 37770"/>
+                    <a:gd name="csY0" fmla="*/ 5607 h 33612"/>
+                    <a:gd name="csX1" fmla="*/ 37770 w 37770"/>
+                    <a:gd name="csY1" fmla="*/ 0 h 33612"/>
+                    <a:gd name="csX2" fmla="*/ 19589 w 37770"/>
+                    <a:gd name="csY2" fmla="*/ 33613 h 33612"/>
+                  </a:gdLst>
+                  <a:ahLst/>
+                  <a:cxnLst>
+                    <a:cxn ang="0">
+                      <a:pos x="csX0" y="csY0"/>
+                    </a:cxn>
+                    <a:cxn ang="0">
+                      <a:pos x="csX1" y="csY1"/>
+                    </a:cxn>
+                    <a:cxn ang="0">
+                      <a:pos x="csX2" y="csY2"/>
+                    </a:cxn>
+                  </a:cxnLst>
+                  <a:rect l="l" t="t" r="r" b="b"/>
+                  <a:pathLst>
+                    <a:path w="37770" h="33612">
+                      <a:moveTo>
+                        <a:pt x="0" y="5607"/>
+                      </a:moveTo>
+                      <a:lnTo>
+                        <a:pt x="37770" y="0"/>
+                      </a:lnTo>
+                      <a:lnTo>
+                        <a:pt x="19589" y="33613"/>
+                      </a:lnTo>
+                      <a:close/>
+                    </a:path>
+                  </a:pathLst>
+                </a:custGeom>
                 <a:solidFill>
-                  <a:srgbClr val="000000"/>
+                  <a:srgbClr val="E74C3C"/>
                 </a:solidFill>
-                <a:latin typeface="Times New Roman"/>
-              </a:rPr>
-              <a:t>X</a:t>
-            </a:r>
-          </a:p>
-        </p:txBody>
-      </p:sp>
-      <p:sp>
-        <p:nvSpPr>
-          <p:cNvPr id="3" name="TextBox 2"/>
-          <p:cNvSpPr txBox="1"/>
-          <p:nvPr/>
-        </p:nvSpPr>
-        <p:spPr>
-          <a:xfrm>
-            <a:off x="411480" y="457200"/>
-            <a:ext cx="548640" cy="365760"/>
-          </a:xfrm>
-          <a:prstGeom prst="rect">
-            <a:avLst/>
-          </a:prstGeom>
-          <a:noFill/>
-        </p:spPr>
-        <p:txBody>
-          <a:bodyPr wrap="none">
-            <a:spAutoFit/>
-          </a:bodyPr>
-          <a:lstStyle/>
-          <a:p>
-            <a:pPr algn="ctr"/>
-            <a:r>
-              <a:rPr sz="1800" b="1" i="1">
+                <a:ln w="10669" cap="rnd">
+                  <a:solidFill>
+                    <a:srgbClr val="E74C3C"/>
+                  </a:solidFill>
+                  <a:prstDash val="solid"/>
+                  <a:round/>
+                </a:ln>
+              </p:spPr>
+              <p:txBody>
+                <a:bodyPr/>
+                <a:lstStyle/>
+                <a:p>
+                  <a:endParaRPr lang="zh-CN" altLang="en-US">
+                    <a:latin typeface="Times New Roman" panose="02020603050405020304" pitchFamily="18" charset="0"/>
+                    <a:cs typeface="Times New Roman" panose="02020603050405020304" pitchFamily="18" charset="0"/>
+                  </a:endParaRPr>
+                </a:p>
+              </p:txBody>
+            </p:sp>
+            <p:grpSp>
+              <p:nvGrpSpPr>
+                <p:cNvPr id="41" name="图形 2">
+                  <a:extLst>
+                    <a:ext uri="{FF2B5EF4-FFF2-40B4-BE49-F238E27FC236}">
+                      <a16:creationId xmlns:a16="http://schemas.microsoft.com/office/drawing/2014/main" id="{520665D3-1515-BB5D-FAEE-3132E808B8E8}"/>
+                    </a:ext>
+                  </a:extLst>
+                </p:cNvPr>
+                <p:cNvGrpSpPr/>
+                <p:nvPr/>
+              </p:nvGrpSpPr>
+              <p:grpSpPr>
+                <a:xfrm>
+                  <a:off x="1210068" y="1164854"/>
+                  <a:ext cx="897116" cy="628842"/>
+                  <a:chOff x="1602404" y="1334054"/>
+                  <a:chExt cx="897116" cy="628842"/>
+                </a:xfrm>
+              </p:grpSpPr>
+              <p:sp>
+                <p:nvSpPr>
+                  <p:cNvPr id="42" name="任意多边形: 形状 41">
+                    <a:extLst>
+                      <a:ext uri="{FF2B5EF4-FFF2-40B4-BE49-F238E27FC236}">
+                        <a16:creationId xmlns:a16="http://schemas.microsoft.com/office/drawing/2014/main" id="{31089B29-DEA8-EC1D-4B01-D066DB629876}"/>
+                      </a:ext>
+                    </a:extLst>
+                  </p:cNvPr>
+                  <p:cNvSpPr/>
+                  <p:nvPr/>
+                </p:nvSpPr>
+                <p:spPr>
+                  <a:xfrm>
+                    <a:off x="1602404" y="1334054"/>
+                    <a:ext cx="897116" cy="628842"/>
+                  </a:xfrm>
+                  <a:custGeom>
+                    <a:avLst/>
+                    <a:gdLst>
+                      <a:gd name="csX0" fmla="*/ 0 w 897116"/>
+                      <a:gd name="csY0" fmla="*/ 628842 h 628842"/>
+                      <a:gd name="csX1" fmla="*/ 897117 w 897116"/>
+                      <a:gd name="csY1" fmla="*/ 0 h 628842"/>
+                    </a:gdLst>
+                    <a:ahLst/>
+                    <a:cxnLst>
+                      <a:cxn ang="0">
+                        <a:pos x="csX0" y="csY0"/>
+                      </a:cxn>
+                      <a:cxn ang="0">
+                        <a:pos x="csX1" y="csY1"/>
+                      </a:cxn>
+                    </a:cxnLst>
+                    <a:rect l="l" t="t" r="r" b="b"/>
+                    <a:pathLst>
+                      <a:path w="897116" h="628842">
+                        <a:moveTo>
+                          <a:pt x="0" y="628842"/>
+                        </a:moveTo>
+                        <a:cubicBezTo>
+                          <a:pt x="299039" y="419228"/>
+                          <a:pt x="598078" y="209614"/>
+                          <a:pt x="897117" y="0"/>
+                        </a:cubicBezTo>
+                      </a:path>
+                    </a:pathLst>
+                  </a:custGeom>
+                  <a:noFill/>
+                  <a:ln w="10669" cap="rnd">
+                    <a:solidFill>
+                      <a:srgbClr val="7F8C8D"/>
+                    </a:solidFill>
+                    <a:prstDash val="solid"/>
+                    <a:round/>
+                  </a:ln>
+                </p:spPr>
+                <p:txBody>
+                  <a:bodyPr/>
+                  <a:lstStyle/>
+                  <a:p>
+                    <a:endParaRPr lang="zh-CN" altLang="en-US">
+                      <a:latin typeface="Times New Roman" panose="02020603050405020304" pitchFamily="18" charset="0"/>
+                      <a:cs typeface="Times New Roman" panose="02020603050405020304" pitchFamily="18" charset="0"/>
+                    </a:endParaRPr>
+                  </a:p>
+                </p:txBody>
+              </p:sp>
+              <p:sp>
+                <p:nvSpPr>
+                  <p:cNvPr id="43" name="任意多边形: 形状 42">
+                    <a:extLst>
+                      <a:ext uri="{FF2B5EF4-FFF2-40B4-BE49-F238E27FC236}">
+                        <a16:creationId xmlns:a16="http://schemas.microsoft.com/office/drawing/2014/main" id="{F0E3A3AE-787A-D924-00B1-B48BBA2DB3A8}"/>
+                      </a:ext>
+                    </a:extLst>
+                  </p:cNvPr>
+                  <p:cNvSpPr/>
+                  <p:nvPr/>
+                </p:nvSpPr>
+                <p:spPr>
+                  <a:xfrm>
+                    <a:off x="1602404" y="1920880"/>
+                    <a:ext cx="47212" cy="42015"/>
+                  </a:xfrm>
+                  <a:custGeom>
+                    <a:avLst/>
+                    <a:gdLst>
+                      <a:gd name="csX0" fmla="*/ 47213 w 47212"/>
+                      <a:gd name="csY0" fmla="*/ 35007 h 42015"/>
+                      <a:gd name="csX1" fmla="*/ 0 w 47212"/>
+                      <a:gd name="csY1" fmla="*/ 42016 h 42015"/>
+                      <a:gd name="csX2" fmla="*/ 22727 w 47212"/>
+                      <a:gd name="csY2" fmla="*/ 0 h 42015"/>
+                    </a:gdLst>
+                    <a:ahLst/>
+                    <a:cxnLst>
+                      <a:cxn ang="0">
+                        <a:pos x="csX0" y="csY0"/>
+                      </a:cxn>
+                      <a:cxn ang="0">
+                        <a:pos x="csX1" y="csY1"/>
+                      </a:cxn>
+                      <a:cxn ang="0">
+                        <a:pos x="csX2" y="csY2"/>
+                      </a:cxn>
+                    </a:cxnLst>
+                    <a:rect l="l" t="t" r="r" b="b"/>
+                    <a:pathLst>
+                      <a:path w="47212" h="42015">
+                        <a:moveTo>
+                          <a:pt x="47213" y="35007"/>
+                        </a:moveTo>
+                        <a:lnTo>
+                          <a:pt x="0" y="42016"/>
+                        </a:lnTo>
+                        <a:lnTo>
+                          <a:pt x="22727" y="0"/>
+                        </a:lnTo>
+                        <a:close/>
+                      </a:path>
+                    </a:pathLst>
+                  </a:custGeom>
+                  <a:solidFill>
+                    <a:srgbClr val="7F8C8D"/>
+                  </a:solidFill>
+                  <a:ln w="10669" cap="rnd">
+                    <a:solidFill>
+                      <a:srgbClr val="7F8C8D"/>
+                    </a:solidFill>
+                    <a:prstDash val="solid"/>
+                    <a:round/>
+                  </a:ln>
+                </p:spPr>
+                <p:txBody>
+                  <a:bodyPr/>
+                  <a:lstStyle/>
+                  <a:p>
+                    <a:endParaRPr lang="zh-CN" altLang="en-US">
+                      <a:latin typeface="Times New Roman" panose="02020603050405020304" pitchFamily="18" charset="0"/>
+                      <a:cs typeface="Times New Roman" panose="02020603050405020304" pitchFamily="18" charset="0"/>
+                    </a:endParaRPr>
+                  </a:p>
+                </p:txBody>
+              </p:sp>
+              <p:sp>
+                <p:nvSpPr>
+                  <p:cNvPr id="44" name="任意多边形: 形状 43">
+                    <a:extLst>
+                      <a:ext uri="{FF2B5EF4-FFF2-40B4-BE49-F238E27FC236}">
+                        <a16:creationId xmlns:a16="http://schemas.microsoft.com/office/drawing/2014/main" id="{629A63CF-B097-AB11-610B-6EA653CFC698}"/>
+                      </a:ext>
+                    </a:extLst>
+                  </p:cNvPr>
+                  <p:cNvSpPr/>
+                  <p:nvPr/>
+                </p:nvSpPr>
+                <p:spPr>
+                  <a:xfrm>
+                    <a:off x="2452309" y="1334054"/>
+                    <a:ext cx="47212" cy="42015"/>
+                  </a:xfrm>
+                  <a:custGeom>
+                    <a:avLst/>
+                    <a:gdLst>
+                      <a:gd name="csX0" fmla="*/ 0 w 47212"/>
+                      <a:gd name="csY0" fmla="*/ 7009 h 42015"/>
+                      <a:gd name="csX1" fmla="*/ 47213 w 47212"/>
+                      <a:gd name="csY1" fmla="*/ 0 h 42015"/>
+                      <a:gd name="csX2" fmla="*/ 24486 w 47212"/>
+                      <a:gd name="csY2" fmla="*/ 42016 h 42015"/>
+                    </a:gdLst>
+                    <a:ahLst/>
+                    <a:cxnLst>
+                      <a:cxn ang="0">
+                        <a:pos x="csX0" y="csY0"/>
+                      </a:cxn>
+                      <a:cxn ang="0">
+                        <a:pos x="csX1" y="csY1"/>
+                      </a:cxn>
+                      <a:cxn ang="0">
+                        <a:pos x="csX2" y="csY2"/>
+                      </a:cxn>
+                    </a:cxnLst>
+                    <a:rect l="l" t="t" r="r" b="b"/>
+                    <a:pathLst>
+                      <a:path w="47212" h="42015">
+                        <a:moveTo>
+                          <a:pt x="0" y="7009"/>
+                        </a:moveTo>
+                        <a:lnTo>
+                          <a:pt x="47213" y="0"/>
+                        </a:lnTo>
+                        <a:lnTo>
+                          <a:pt x="24486" y="42016"/>
+                        </a:lnTo>
+                        <a:close/>
+                      </a:path>
+                    </a:pathLst>
+                  </a:custGeom>
+                  <a:solidFill>
+                    <a:srgbClr val="7F8C8D"/>
+                  </a:solidFill>
+                  <a:ln w="10669" cap="rnd">
+                    <a:solidFill>
+                      <a:srgbClr val="7F8C8D"/>
+                    </a:solidFill>
+                    <a:prstDash val="solid"/>
+                    <a:round/>
+                  </a:ln>
+                </p:spPr>
+                <p:txBody>
+                  <a:bodyPr/>
+                  <a:lstStyle/>
+                  <a:p>
+                    <a:endParaRPr lang="zh-CN" altLang="en-US">
+                      <a:latin typeface="Times New Roman" panose="02020603050405020304" pitchFamily="18" charset="0"/>
+                      <a:cs typeface="Times New Roman" panose="02020603050405020304" pitchFamily="18" charset="0"/>
+                    </a:endParaRPr>
+                  </a:p>
+                </p:txBody>
+              </p:sp>
+            </p:grpSp>
+            <p:sp>
+              <p:nvSpPr>
+                <p:cNvPr id="48" name="任意多边形: 形状 47">
+                  <a:extLst>
+                    <a:ext uri="{FF2B5EF4-FFF2-40B4-BE49-F238E27FC236}">
+                      <a16:creationId xmlns:a16="http://schemas.microsoft.com/office/drawing/2014/main" id="{9AE0D710-B195-1C5B-DEC6-F4ADBEBE9E84}"/>
+                    </a:ext>
+                  </a:extLst>
+                </p:cNvPr>
+                <p:cNvSpPr/>
+                <p:nvPr/>
+              </p:nvSpPr>
+              <p:spPr>
+                <a:xfrm>
+                  <a:off x="1361392" y="2219828"/>
+                  <a:ext cx="395995" cy="343525"/>
+                </a:xfrm>
+                <a:custGeom>
+                  <a:avLst/>
+                  <a:gdLst>
+                    <a:gd name="csX0" fmla="*/ 305495 w 395995"/>
+                    <a:gd name="csY0" fmla="*/ 0 h 343525"/>
+                    <a:gd name="csX1" fmla="*/ 0 w 395995"/>
+                    <a:gd name="csY1" fmla="*/ 214139 h 343525"/>
+                    <a:gd name="csX2" fmla="*/ 90500 w 395995"/>
+                    <a:gd name="csY2" fmla="*/ 343526 h 343525"/>
+                    <a:gd name="csX3" fmla="*/ 395995 w 395995"/>
+                    <a:gd name="csY3" fmla="*/ 129387 h 343525"/>
+                  </a:gdLst>
+                  <a:ahLst/>
+                  <a:cxnLst>
+                    <a:cxn ang="0">
+                      <a:pos x="csX0" y="csY0"/>
+                    </a:cxn>
+                    <a:cxn ang="0">
+                      <a:pos x="csX1" y="csY1"/>
+                    </a:cxn>
+                    <a:cxn ang="0">
+                      <a:pos x="csX2" y="csY2"/>
+                    </a:cxn>
+                    <a:cxn ang="0">
+                      <a:pos x="csX3" y="csY3"/>
+                    </a:cxn>
+                  </a:cxnLst>
+                  <a:rect l="l" t="t" r="r" b="b"/>
+                  <a:pathLst>
+                    <a:path w="395995" h="343525">
+                      <a:moveTo>
+                        <a:pt x="305495" y="0"/>
+                      </a:moveTo>
+                      <a:lnTo>
+                        <a:pt x="0" y="214139"/>
+                      </a:lnTo>
+                      <a:lnTo>
+                        <a:pt x="90500" y="343526"/>
+                      </a:lnTo>
+                      <a:lnTo>
+                        <a:pt x="395995" y="129387"/>
+                      </a:lnTo>
+                      <a:close/>
+                    </a:path>
+                  </a:pathLst>
+                </a:custGeom>
                 <a:solidFill>
-                  <a:srgbClr val="000000"/>
+                  <a:srgbClr val="3498DB">
+                    <a:alpha val="12000"/>
+                  </a:srgbClr>
                 </a:solidFill>
-                <a:latin typeface="Times New Roman"/>
-              </a:rPr>
-              <a:t>Y</a:t>
-            </a:r>
-          </a:p>
-        </p:txBody>
-      </p:sp>
-      <p:cxnSp>
-        <p:nvCxnSpPr>
-          <p:cNvPr id="0" name=""/>
-          <p:cNvCxnSpPr/>
-          <p:nvPr/>
-        </p:nvCxnSpPr>
-        <p:spPr>
-          <a:xfrm flipH="0" flipV="1">
-            <a:off x="2743200" y="2370565"/>
-            <a:ext cx="2621614" cy="1835674"/>
-          </a:xfrm>
-          <a:prstGeom prst="line">
-            <a:avLst/>
-          </a:prstGeom>
-          <a:ln w="25400">
-            <a:solidFill>
-              <a:srgbClr val="000000"/>
-            </a:solidFill>
-          </a:ln>
-        </p:spPr>
-      </p:cxnSp>
-      <p:cxnSp>
-        <p:nvCxnSpPr>
-          <p:cNvPr id="0" name=""/>
-          <p:cNvCxnSpPr/>
-          <p:nvPr/>
-        </p:nvCxnSpPr>
-        <p:spPr>
-          <a:xfrm flipH="0" flipV="0">
-            <a:off x="2218721" y="3457207"/>
-            <a:ext cx="1048956" cy="1498065"/>
-          </a:xfrm>
-          <a:prstGeom prst="line">
-            <a:avLst/>
-          </a:prstGeom>
-          <a:ln w="19050">
-            <a:solidFill>
-              <a:srgbClr val="000000"/>
-            </a:solidFill>
-          </a:ln>
-        </p:spPr>
-      </p:cxnSp>
-      <p:cxnSp>
-        <p:nvCxnSpPr>
-          <p:cNvPr id="0" name=""/>
-          <p:cNvCxnSpPr/>
-          <p:nvPr/>
-        </p:nvCxnSpPr>
-        <p:spPr>
-          <a:xfrm flipH="0" flipV="0">
-            <a:off x="4840335" y="1621533"/>
-            <a:ext cx="1048956" cy="1498065"/>
-          </a:xfrm>
-          <a:prstGeom prst="line">
-            <a:avLst/>
-          </a:prstGeom>
-          <a:ln w="19050">
-            <a:solidFill>
-              <a:srgbClr val="000000"/>
-            </a:solidFill>
-          </a:ln>
-        </p:spPr>
-      </p:cxnSp>
-      <p:sp>
-        <p:nvSpPr>
-          <p:cNvPr id="4" name="Rectangle 3"/>
-          <p:cNvSpPr/>
-          <p:nvPr/>
-        </p:nvSpPr>
-        <p:spPr>
-          <a:xfrm rot="19500000">
-            <a:off x="2136425" y="3182887"/>
-            <a:ext cx="164592" cy="548640"/>
-          </a:xfrm>
-          <a:prstGeom prst="rect">
-            <a:avLst/>
-          </a:prstGeom>
-          <a:solidFill>
-            <a:srgbClr val="FFFFFF"/>
-          </a:solidFill>
-          <a:ln w="19050">
-            <a:solidFill>
-              <a:srgbClr val="000000"/>
-            </a:solidFill>
-          </a:ln>
-        </p:spPr>
-        <p:style>
-          <a:lnRef idx="1">
-            <a:schemeClr val="accent1"/>
-          </a:lnRef>
-          <a:fillRef idx="3">
-            <a:schemeClr val="accent1"/>
-          </a:fillRef>
-          <a:effectRef idx="2">
-            <a:schemeClr val="accent1"/>
-          </a:effectRef>
-          <a:fontRef idx="minor">
-            <a:schemeClr val="lt1"/>
-          </a:fontRef>
-        </p:style>
-        <p:txBody>
-          <a:bodyPr rtlCol="0" anchor="ctr"/>
-          <a:lstStyle/>
-          <a:p>
-            <a:pPr algn="ctr"/>
-          </a:p>
-        </p:txBody>
-      </p:sp>
-      <p:sp>
-        <p:nvSpPr>
-          <p:cNvPr id="5" name="Rectangle 4"/>
-          <p:cNvSpPr/>
-          <p:nvPr/>
-        </p:nvSpPr>
-        <p:spPr>
-          <a:xfrm rot="19500000">
-            <a:off x="3185382" y="4680952"/>
-            <a:ext cx="164592" cy="548640"/>
-          </a:xfrm>
-          <a:prstGeom prst="rect">
-            <a:avLst/>
-          </a:prstGeom>
-          <a:solidFill>
-            <a:srgbClr val="FFFFFF"/>
-          </a:solidFill>
-          <a:ln w="19050">
-            <a:solidFill>
-              <a:srgbClr val="000000"/>
-            </a:solidFill>
-          </a:ln>
-        </p:spPr>
-        <p:style>
-          <a:lnRef idx="1">
-            <a:schemeClr val="accent1"/>
-          </a:lnRef>
-          <a:fillRef idx="3">
-            <a:schemeClr val="accent1"/>
-          </a:fillRef>
-          <a:effectRef idx="2">
-            <a:schemeClr val="accent1"/>
-          </a:effectRef>
-          <a:fontRef idx="minor">
-            <a:schemeClr val="lt1"/>
-          </a:fontRef>
-        </p:style>
-        <p:txBody>
-          <a:bodyPr rtlCol="0" anchor="ctr"/>
-          <a:lstStyle/>
-          <a:p>
-            <a:pPr algn="ctr"/>
-          </a:p>
-        </p:txBody>
-      </p:sp>
-      <p:sp>
-        <p:nvSpPr>
-          <p:cNvPr id="6" name="Rectangle 5"/>
-          <p:cNvSpPr/>
-          <p:nvPr/>
-        </p:nvSpPr>
-        <p:spPr>
-          <a:xfrm rot="21000000">
-            <a:off x="4758039" y="1347213"/>
-            <a:ext cx="164592" cy="548640"/>
-          </a:xfrm>
-          <a:prstGeom prst="rect">
-            <a:avLst/>
-          </a:prstGeom>
-          <a:solidFill>
-            <a:srgbClr val="FFFFFF"/>
-          </a:solidFill>
-          <a:ln w="19050">
-            <a:solidFill>
-              <a:srgbClr val="000000"/>
-            </a:solidFill>
-          </a:ln>
-        </p:spPr>
-        <p:style>
-          <a:lnRef idx="1">
-            <a:schemeClr val="accent1"/>
-          </a:lnRef>
-          <a:fillRef idx="3">
-            <a:schemeClr val="accent1"/>
-          </a:fillRef>
-          <a:effectRef idx="2">
-            <a:schemeClr val="accent1"/>
-          </a:effectRef>
-          <a:fontRef idx="minor">
-            <a:schemeClr val="lt1"/>
-          </a:fontRef>
-        </p:style>
-        <p:txBody>
-          <a:bodyPr rtlCol="0" anchor="ctr"/>
-          <a:lstStyle/>
-          <a:p>
-            <a:pPr algn="ctr"/>
-          </a:p>
-        </p:txBody>
-      </p:sp>
-      <p:sp>
-        <p:nvSpPr>
-          <p:cNvPr id="7" name="Rectangle 6"/>
-          <p:cNvSpPr/>
-          <p:nvPr/>
-        </p:nvSpPr>
-        <p:spPr>
-          <a:xfrm rot="21000000">
-            <a:off x="5806996" y="2845278"/>
-            <a:ext cx="164592" cy="548640"/>
-          </a:xfrm>
-          <a:prstGeom prst="rect">
-            <a:avLst/>
-          </a:prstGeom>
-          <a:solidFill>
-            <a:srgbClr val="FFFFFF"/>
-          </a:solidFill>
-          <a:ln w="19050">
-            <a:solidFill>
-              <a:srgbClr val="000000"/>
-            </a:solidFill>
-          </a:ln>
-        </p:spPr>
-        <p:style>
-          <a:lnRef idx="1">
-            <a:schemeClr val="accent1"/>
-          </a:lnRef>
-          <a:fillRef idx="3">
-            <a:schemeClr val="accent1"/>
-          </a:fillRef>
-          <a:effectRef idx="2">
-            <a:schemeClr val="accent1"/>
-          </a:effectRef>
-          <a:fontRef idx="minor">
-            <a:schemeClr val="lt1"/>
-          </a:fontRef>
-        </p:style>
-        <p:txBody>
-          <a:bodyPr rtlCol="0" anchor="ctr"/>
-          <a:lstStyle/>
-          <a:p>
-            <a:pPr algn="ctr"/>
-          </a:p>
-        </p:txBody>
-      </p:sp>
-      <p:sp>
-        <p:nvSpPr>
-          <p:cNvPr id="8" name="Oval 7"/>
-          <p:cNvSpPr/>
-          <p:nvPr/>
-        </p:nvSpPr>
-        <p:spPr>
-          <a:xfrm>
-            <a:off x="2706624" y="4169663"/>
-            <a:ext cx="73152" cy="73152"/>
-          </a:xfrm>
-          <a:prstGeom prst="ellipse">
-            <a:avLst/>
-          </a:prstGeom>
-          <a:solidFill>
-            <a:srgbClr val="000000"/>
-          </a:solidFill>
-          <a:ln>
+                <a:ln w="17782" cap="flat">
+                  <a:solidFill>
+                    <a:srgbClr val="3498DB">
+                      <a:alpha val="12000"/>
+                    </a:srgbClr>
+                  </a:solidFill>
+                  <a:custDash>
+                    <a:ds d="693750" sp="300000"/>
+                  </a:custDash>
+                  <a:miter/>
+                </a:ln>
+              </p:spPr>
+              <p:txBody>
+                <a:bodyPr/>
+                <a:lstStyle/>
+                <a:p>
+                  <a:endParaRPr lang="zh-CN" altLang="en-US">
+                    <a:latin typeface="Times New Roman" panose="02020603050405020304" pitchFamily="18" charset="0"/>
+                    <a:cs typeface="Times New Roman" panose="02020603050405020304" pitchFamily="18" charset="0"/>
+                  </a:endParaRPr>
+                </a:p>
+              </p:txBody>
+            </p:sp>
+            <p:sp>
+              <p:nvSpPr>
+                <p:cNvPr id="49" name="任意多边形: 形状 48">
+                  <a:extLst>
+                    <a:ext uri="{FF2B5EF4-FFF2-40B4-BE49-F238E27FC236}">
+                      <a16:creationId xmlns:a16="http://schemas.microsoft.com/office/drawing/2014/main" id="{93C60F50-FF6B-CC1E-9BF6-BD465D5D6890}"/>
+                    </a:ext>
+                  </a:extLst>
+                </p:cNvPr>
+                <p:cNvSpPr/>
+                <p:nvPr/>
+              </p:nvSpPr>
+              <p:spPr>
+                <a:xfrm rot="2776302">
+                  <a:off x="2361957" y="1513288"/>
+                  <a:ext cx="323113" cy="402298"/>
+                </a:xfrm>
+                <a:custGeom>
+                  <a:avLst/>
+                  <a:gdLst>
+                    <a:gd name="csX0" fmla="*/ 186470 w 323113"/>
+                    <a:gd name="csY0" fmla="*/ 0 h 402298"/>
+                    <a:gd name="csX1" fmla="*/ 0 w 323113"/>
+                    <a:gd name="csY1" fmla="*/ 323322 h 402298"/>
+                    <a:gd name="csX2" fmla="*/ 136643 w 323113"/>
+                    <a:gd name="csY2" fmla="*/ 402298 h 402298"/>
+                    <a:gd name="csX3" fmla="*/ 323114 w 323113"/>
+                    <a:gd name="csY3" fmla="*/ 78976 h 402298"/>
+                  </a:gdLst>
+                  <a:ahLst/>
+                  <a:cxnLst>
+                    <a:cxn ang="0">
+                      <a:pos x="csX0" y="csY0"/>
+                    </a:cxn>
+                    <a:cxn ang="0">
+                      <a:pos x="csX1" y="csY1"/>
+                    </a:cxn>
+                    <a:cxn ang="0">
+                      <a:pos x="csX2" y="csY2"/>
+                    </a:cxn>
+                    <a:cxn ang="0">
+                      <a:pos x="csX3" y="csY3"/>
+                    </a:cxn>
+                  </a:cxnLst>
+                  <a:rect l="l" t="t" r="r" b="b"/>
+                  <a:pathLst>
+                    <a:path w="323113" h="402298">
+                      <a:moveTo>
+                        <a:pt x="186470" y="0"/>
+                      </a:moveTo>
+                      <a:lnTo>
+                        <a:pt x="0" y="323322"/>
+                      </a:lnTo>
+                      <a:lnTo>
+                        <a:pt x="136643" y="402298"/>
+                      </a:lnTo>
+                      <a:lnTo>
+                        <a:pt x="323114" y="78976"/>
+                      </a:lnTo>
+                      <a:close/>
+                    </a:path>
+                  </a:pathLst>
+                </a:custGeom>
+                <a:solidFill>
+                  <a:srgbClr val="3498DB">
+                    <a:alpha val="12000"/>
+                  </a:srgbClr>
+                </a:solidFill>
+                <a:ln w="17782" cap="flat">
+                  <a:solidFill>
+                    <a:srgbClr val="3498DB">
+                      <a:alpha val="12000"/>
+                    </a:srgbClr>
+                  </a:solidFill>
+                  <a:custDash>
+                    <a:ds d="693750" sp="300000"/>
+                  </a:custDash>
+                  <a:miter/>
+                </a:ln>
+              </p:spPr>
+              <p:txBody>
+                <a:bodyPr/>
+                <a:lstStyle/>
+                <a:p>
+                  <a:endParaRPr lang="zh-CN" altLang="en-US">
+                    <a:latin typeface="Times New Roman" panose="02020603050405020304" pitchFamily="18" charset="0"/>
+                    <a:cs typeface="Times New Roman" panose="02020603050405020304" pitchFamily="18" charset="0"/>
+                  </a:endParaRPr>
+                </a:p>
+              </p:txBody>
+            </p:sp>
+            <p:sp>
+              <p:nvSpPr>
+                <p:cNvPr id="50" name="任意多边形: 形状 49">
+                  <a:extLst>
+                    <a:ext uri="{FF2B5EF4-FFF2-40B4-BE49-F238E27FC236}">
+                      <a16:creationId xmlns:a16="http://schemas.microsoft.com/office/drawing/2014/main" id="{5273FDF8-E34D-DF22-A613-33B256E2F5D7}"/>
+                    </a:ext>
+                  </a:extLst>
+                </p:cNvPr>
+                <p:cNvSpPr/>
+                <p:nvPr/>
+              </p:nvSpPr>
+              <p:spPr>
+                <a:xfrm>
+                  <a:off x="2053521" y="2043882"/>
+                  <a:ext cx="38545" cy="41407"/>
+                </a:xfrm>
+                <a:custGeom>
+                  <a:avLst/>
+                  <a:gdLst>
+                    <a:gd name="csX0" fmla="*/ 0 w 38545"/>
+                    <a:gd name="csY0" fmla="*/ 0 h 41407"/>
+                    <a:gd name="csX1" fmla="*/ 38545 w 38545"/>
+                    <a:gd name="csY1" fmla="*/ 15052 h 41407"/>
+                    <a:gd name="csX2" fmla="*/ 946 w 38545"/>
+                    <a:gd name="csY2" fmla="*/ 41408 h 41407"/>
+                  </a:gdLst>
+                  <a:ahLst/>
+                  <a:cxnLst>
+                    <a:cxn ang="0">
+                      <a:pos x="csX0" y="csY0"/>
+                    </a:cxn>
+                    <a:cxn ang="0">
+                      <a:pos x="csX1" y="csY1"/>
+                    </a:cxn>
+                    <a:cxn ang="0">
+                      <a:pos x="csX2" y="csY2"/>
+                    </a:cxn>
+                  </a:cxnLst>
+                  <a:rect l="l" t="t" r="r" b="b"/>
+                  <a:pathLst>
+                    <a:path w="38545" h="41407">
+                      <a:moveTo>
+                        <a:pt x="0" y="0"/>
+                      </a:moveTo>
+                      <a:lnTo>
+                        <a:pt x="38545" y="15052"/>
+                      </a:lnTo>
+                      <a:lnTo>
+                        <a:pt x="946" y="41408"/>
+                      </a:lnTo>
+                      <a:close/>
+                    </a:path>
+                  </a:pathLst>
+                </a:custGeom>
+                <a:solidFill>
+                  <a:srgbClr val="2980B9"/>
+                </a:solidFill>
+                <a:ln w="7113" cap="flat">
+                  <a:solidFill>
+                    <a:srgbClr val="2980B9"/>
+                  </a:solidFill>
+                  <a:prstDash val="solid"/>
+                  <a:miter/>
+                </a:ln>
+              </p:spPr>
+              <p:txBody>
+                <a:bodyPr/>
+                <a:lstStyle/>
+                <a:p>
+                  <a:endParaRPr lang="zh-CN" altLang="en-US">
+                    <a:latin typeface="Times New Roman" panose="02020603050405020304" pitchFamily="18" charset="0"/>
+                    <a:cs typeface="Times New Roman" panose="02020603050405020304" pitchFamily="18" charset="0"/>
+                  </a:endParaRPr>
+                </a:p>
+              </p:txBody>
+            </p:sp>
+            <p:sp>
+              <p:nvSpPr>
+                <p:cNvPr id="52" name="任意多边形: 形状 51">
+                  <a:extLst>
+                    <a:ext uri="{FF2B5EF4-FFF2-40B4-BE49-F238E27FC236}">
+                      <a16:creationId xmlns:a16="http://schemas.microsoft.com/office/drawing/2014/main" id="{A1C52B53-B2F9-3664-5D6D-C9200839DD09}"/>
+                    </a:ext>
+                  </a:extLst>
+                </p:cNvPr>
+                <p:cNvSpPr/>
+                <p:nvPr/>
+              </p:nvSpPr>
+              <p:spPr>
+                <a:xfrm>
+                  <a:off x="1648805" y="2577961"/>
+                  <a:ext cx="395995" cy="343525"/>
+                </a:xfrm>
+                <a:custGeom>
+                  <a:avLst/>
+                  <a:gdLst>
+                    <a:gd name="csX0" fmla="*/ 305495 w 395995"/>
+                    <a:gd name="csY0" fmla="*/ 0 h 343525"/>
+                    <a:gd name="csX1" fmla="*/ 0 w 395995"/>
+                    <a:gd name="csY1" fmla="*/ 214140 h 343525"/>
+                    <a:gd name="csX2" fmla="*/ 90500 w 395995"/>
+                    <a:gd name="csY2" fmla="*/ 343526 h 343525"/>
+                    <a:gd name="csX3" fmla="*/ 395995 w 395995"/>
+                    <a:gd name="csY3" fmla="*/ 129387 h 343525"/>
+                  </a:gdLst>
+                  <a:ahLst/>
+                  <a:cxnLst>
+                    <a:cxn ang="0">
+                      <a:pos x="csX0" y="csY0"/>
+                    </a:cxn>
+                    <a:cxn ang="0">
+                      <a:pos x="csX1" y="csY1"/>
+                    </a:cxn>
+                    <a:cxn ang="0">
+                      <a:pos x="csX2" y="csY2"/>
+                    </a:cxn>
+                    <a:cxn ang="0">
+                      <a:pos x="csX3" y="csY3"/>
+                    </a:cxn>
+                  </a:cxnLst>
+                  <a:rect l="l" t="t" r="r" b="b"/>
+                  <a:pathLst>
+                    <a:path w="395995" h="343525">
+                      <a:moveTo>
+                        <a:pt x="305495" y="0"/>
+                      </a:moveTo>
+                      <a:lnTo>
+                        <a:pt x="0" y="214140"/>
+                      </a:lnTo>
+                      <a:lnTo>
+                        <a:pt x="90500" y="343526"/>
+                      </a:lnTo>
+                      <a:lnTo>
+                        <a:pt x="395995" y="129387"/>
+                      </a:lnTo>
+                      <a:close/>
+                    </a:path>
+                  </a:pathLst>
+                </a:custGeom>
+                <a:solidFill>
+                  <a:srgbClr val="2C3E50"/>
+                </a:solidFill>
+                <a:ln w="10669" cap="flat">
+                  <a:solidFill>
+                    <a:srgbClr val="1A252F"/>
+                  </a:solidFill>
+                  <a:prstDash val="solid"/>
+                  <a:miter/>
+                </a:ln>
+              </p:spPr>
+              <p:txBody>
+                <a:bodyPr/>
+                <a:lstStyle/>
+                <a:p>
+                  <a:endParaRPr lang="zh-CN" altLang="en-US">
+                    <a:latin typeface="Times New Roman" panose="02020603050405020304" pitchFamily="18" charset="0"/>
+                    <a:cs typeface="Times New Roman" panose="02020603050405020304" pitchFamily="18" charset="0"/>
+                  </a:endParaRPr>
+                </a:p>
+              </p:txBody>
+            </p:sp>
+            <p:sp>
+              <p:nvSpPr>
+                <p:cNvPr id="53" name="任意多边形: 形状 52">
+                  <a:extLst>
+                    <a:ext uri="{FF2B5EF4-FFF2-40B4-BE49-F238E27FC236}">
+                      <a16:creationId xmlns:a16="http://schemas.microsoft.com/office/drawing/2014/main" id="{68CC42F2-2E4A-017D-A122-F864E9C81B0D}"/>
+                    </a:ext>
+                  </a:extLst>
+                </p:cNvPr>
+                <p:cNvSpPr/>
+                <p:nvPr/>
+              </p:nvSpPr>
+              <p:spPr>
+                <a:xfrm>
+                  <a:off x="1122258" y="1825167"/>
+                  <a:ext cx="395995" cy="343525"/>
+                </a:xfrm>
+                <a:custGeom>
+                  <a:avLst/>
+                  <a:gdLst>
+                    <a:gd name="csX0" fmla="*/ 305495 w 395995"/>
+                    <a:gd name="csY0" fmla="*/ 0 h 343525"/>
+                    <a:gd name="csX1" fmla="*/ 0 w 395995"/>
+                    <a:gd name="csY1" fmla="*/ 214139 h 343525"/>
+                    <a:gd name="csX2" fmla="*/ 90500 w 395995"/>
+                    <a:gd name="csY2" fmla="*/ 343526 h 343525"/>
+                    <a:gd name="csX3" fmla="*/ 395995 w 395995"/>
+                    <a:gd name="csY3" fmla="*/ 129387 h 343525"/>
+                  </a:gdLst>
+                  <a:ahLst/>
+                  <a:cxnLst>
+                    <a:cxn ang="0">
+                      <a:pos x="csX0" y="csY0"/>
+                    </a:cxn>
+                    <a:cxn ang="0">
+                      <a:pos x="csX1" y="csY1"/>
+                    </a:cxn>
+                    <a:cxn ang="0">
+                      <a:pos x="csX2" y="csY2"/>
+                    </a:cxn>
+                    <a:cxn ang="0">
+                      <a:pos x="csX3" y="csY3"/>
+                    </a:cxn>
+                  </a:cxnLst>
+                  <a:rect l="l" t="t" r="r" b="b"/>
+                  <a:pathLst>
+                    <a:path w="395995" h="343525">
+                      <a:moveTo>
+                        <a:pt x="305495" y="0"/>
+                      </a:moveTo>
+                      <a:lnTo>
+                        <a:pt x="0" y="214139"/>
+                      </a:lnTo>
+                      <a:lnTo>
+                        <a:pt x="90500" y="343526"/>
+                      </a:lnTo>
+                      <a:lnTo>
+                        <a:pt x="395995" y="129387"/>
+                      </a:lnTo>
+                      <a:close/>
+                    </a:path>
+                  </a:pathLst>
+                </a:custGeom>
+                <a:solidFill>
+                  <a:srgbClr val="2C3E50"/>
+                </a:solidFill>
+                <a:ln w="10669" cap="flat">
+                  <a:solidFill>
+                    <a:srgbClr val="1A252F"/>
+                  </a:solidFill>
+                  <a:prstDash val="solid"/>
+                  <a:miter/>
+                </a:ln>
+              </p:spPr>
+              <p:txBody>
+                <a:bodyPr/>
+                <a:lstStyle/>
+                <a:p>
+                  <a:endParaRPr lang="zh-CN" altLang="en-US">
+                    <a:latin typeface="Times New Roman" panose="02020603050405020304" pitchFamily="18" charset="0"/>
+                    <a:cs typeface="Times New Roman" panose="02020603050405020304" pitchFamily="18" charset="0"/>
+                  </a:endParaRPr>
+                </a:p>
+              </p:txBody>
+            </p:sp>
+            <p:sp>
+              <p:nvSpPr>
+                <p:cNvPr id="54" name="任意多边形: 形状 53">
+                  <a:extLst>
+                    <a:ext uri="{FF2B5EF4-FFF2-40B4-BE49-F238E27FC236}">
+                      <a16:creationId xmlns:a16="http://schemas.microsoft.com/office/drawing/2014/main" id="{4A40EEAC-6A97-5FF8-3479-439A8C8F2F79}"/>
+                    </a:ext>
+                  </a:extLst>
+                </p:cNvPr>
+                <p:cNvSpPr/>
+                <p:nvPr/>
+              </p:nvSpPr>
+              <p:spPr>
+                <a:xfrm rot="2962768">
+                  <a:off x="2625230" y="1889685"/>
+                  <a:ext cx="323113" cy="402298"/>
+                </a:xfrm>
+                <a:custGeom>
+                  <a:avLst/>
+                  <a:gdLst>
+                    <a:gd name="csX0" fmla="*/ 186470 w 323113"/>
+                    <a:gd name="csY0" fmla="*/ 0 h 402298"/>
+                    <a:gd name="csX1" fmla="*/ 0 w 323113"/>
+                    <a:gd name="csY1" fmla="*/ 323322 h 402298"/>
+                    <a:gd name="csX2" fmla="*/ 136643 w 323113"/>
+                    <a:gd name="csY2" fmla="*/ 402298 h 402298"/>
+                    <a:gd name="csX3" fmla="*/ 323114 w 323113"/>
+                    <a:gd name="csY3" fmla="*/ 78976 h 402298"/>
+                  </a:gdLst>
+                  <a:ahLst/>
+                  <a:cxnLst>
+                    <a:cxn ang="0">
+                      <a:pos x="csX0" y="csY0"/>
+                    </a:cxn>
+                    <a:cxn ang="0">
+                      <a:pos x="csX1" y="csY1"/>
+                    </a:cxn>
+                    <a:cxn ang="0">
+                      <a:pos x="csX2" y="csY2"/>
+                    </a:cxn>
+                    <a:cxn ang="0">
+                      <a:pos x="csX3" y="csY3"/>
+                    </a:cxn>
+                  </a:cxnLst>
+                  <a:rect l="l" t="t" r="r" b="b"/>
+                  <a:pathLst>
+                    <a:path w="323113" h="402298">
+                      <a:moveTo>
+                        <a:pt x="186470" y="0"/>
+                      </a:moveTo>
+                      <a:lnTo>
+                        <a:pt x="0" y="323322"/>
+                      </a:lnTo>
+                      <a:lnTo>
+                        <a:pt x="136643" y="402298"/>
+                      </a:lnTo>
+                      <a:lnTo>
+                        <a:pt x="323114" y="78976"/>
+                      </a:lnTo>
+                      <a:close/>
+                    </a:path>
+                  </a:pathLst>
+                </a:custGeom>
+                <a:solidFill>
+                  <a:srgbClr val="2C3E50"/>
+                </a:solidFill>
+                <a:ln w="10669" cap="flat">
+                  <a:solidFill>
+                    <a:srgbClr val="1A252F"/>
+                  </a:solidFill>
+                  <a:prstDash val="solid"/>
+                  <a:miter/>
+                </a:ln>
+              </p:spPr>
+              <p:txBody>
+                <a:bodyPr/>
+                <a:lstStyle/>
+                <a:p>
+                  <a:endParaRPr lang="zh-CN" altLang="en-US">
+                    <a:latin typeface="Times New Roman" panose="02020603050405020304" pitchFamily="18" charset="0"/>
+                    <a:cs typeface="Times New Roman" panose="02020603050405020304" pitchFamily="18" charset="0"/>
+                  </a:endParaRPr>
+                </a:p>
+              </p:txBody>
+            </p:sp>
+            <p:sp>
+              <p:nvSpPr>
+                <p:cNvPr id="55" name="任意多边形: 形状 54">
+                  <a:extLst>
+                    <a:ext uri="{FF2B5EF4-FFF2-40B4-BE49-F238E27FC236}">
+                      <a16:creationId xmlns:a16="http://schemas.microsoft.com/office/drawing/2014/main" id="{954DCB24-0E6D-AAB7-3DE0-CD38002B734D}"/>
+                    </a:ext>
+                  </a:extLst>
+                </p:cNvPr>
+                <p:cNvSpPr/>
+                <p:nvPr/>
+              </p:nvSpPr>
+              <p:spPr>
+                <a:xfrm rot="3036193">
+                  <a:off x="2098683" y="1136890"/>
+                  <a:ext cx="323113" cy="402298"/>
+                </a:xfrm>
+                <a:custGeom>
+                  <a:avLst/>
+                  <a:gdLst>
+                    <a:gd name="csX0" fmla="*/ 186470 w 323113"/>
+                    <a:gd name="csY0" fmla="*/ 0 h 402298"/>
+                    <a:gd name="csX1" fmla="*/ 0 w 323113"/>
+                    <a:gd name="csY1" fmla="*/ 323322 h 402298"/>
+                    <a:gd name="csX2" fmla="*/ 136644 w 323113"/>
+                    <a:gd name="csY2" fmla="*/ 402298 h 402298"/>
+                    <a:gd name="csX3" fmla="*/ 323114 w 323113"/>
+                    <a:gd name="csY3" fmla="*/ 78976 h 402298"/>
+                  </a:gdLst>
+                  <a:ahLst/>
+                  <a:cxnLst>
+                    <a:cxn ang="0">
+                      <a:pos x="csX0" y="csY0"/>
+                    </a:cxn>
+                    <a:cxn ang="0">
+                      <a:pos x="csX1" y="csY1"/>
+                    </a:cxn>
+                    <a:cxn ang="0">
+                      <a:pos x="csX2" y="csY2"/>
+                    </a:cxn>
+                    <a:cxn ang="0">
+                      <a:pos x="csX3" y="csY3"/>
+                    </a:cxn>
+                  </a:cxnLst>
+                  <a:rect l="l" t="t" r="r" b="b"/>
+                  <a:pathLst>
+                    <a:path w="323113" h="402298">
+                      <a:moveTo>
+                        <a:pt x="186470" y="0"/>
+                      </a:moveTo>
+                      <a:lnTo>
+                        <a:pt x="0" y="323322"/>
+                      </a:lnTo>
+                      <a:lnTo>
+                        <a:pt x="136644" y="402298"/>
+                      </a:lnTo>
+                      <a:lnTo>
+                        <a:pt x="323114" y="78976"/>
+                      </a:lnTo>
+                      <a:close/>
+                    </a:path>
+                  </a:pathLst>
+                </a:custGeom>
+                <a:solidFill>
+                  <a:srgbClr val="2C3E50"/>
+                </a:solidFill>
+                <a:ln w="10669" cap="flat">
+                  <a:solidFill>
+                    <a:srgbClr val="1A252F"/>
+                  </a:solidFill>
+                  <a:prstDash val="solid"/>
+                  <a:miter/>
+                </a:ln>
+              </p:spPr>
+              <p:txBody>
+                <a:bodyPr/>
+                <a:lstStyle/>
+                <a:p>
+                  <a:endParaRPr lang="zh-CN" altLang="en-US">
+                    <a:latin typeface="Times New Roman" panose="02020603050405020304" pitchFamily="18" charset="0"/>
+                    <a:cs typeface="Times New Roman" panose="02020603050405020304" pitchFamily="18" charset="0"/>
+                  </a:endParaRPr>
+                </a:p>
+              </p:txBody>
+            </p:sp>
+            <p:sp>
+              <p:nvSpPr>
+                <p:cNvPr id="56" name="任意多边形: 形状 55">
+                  <a:extLst>
+                    <a:ext uri="{FF2B5EF4-FFF2-40B4-BE49-F238E27FC236}">
+                      <a16:creationId xmlns:a16="http://schemas.microsoft.com/office/drawing/2014/main" id="{5C957AE9-8838-FD5C-1A0A-7E6C5E5E90F4}"/>
+                    </a:ext>
+                  </a:extLst>
+                </p:cNvPr>
+                <p:cNvSpPr/>
+                <p:nvPr/>
+              </p:nvSpPr>
+              <p:spPr>
+                <a:xfrm>
+                  <a:off x="1555069" y="2344837"/>
+                  <a:ext cx="56920" cy="56981"/>
+                </a:xfrm>
+                <a:custGeom>
+                  <a:avLst/>
+                  <a:gdLst>
+                    <a:gd name="csX0" fmla="*/ 28633 w 56920"/>
+                    <a:gd name="csY0" fmla="*/ 57271 h 56981"/>
+                    <a:gd name="csX1" fmla="*/ 48757 w 56920"/>
+                    <a:gd name="csY1" fmla="*/ 48926 h 56981"/>
+                    <a:gd name="csX2" fmla="*/ 57093 w 56920"/>
+                    <a:gd name="csY2" fmla="*/ 28780 h 56981"/>
+                    <a:gd name="csX3" fmla="*/ 48757 w 56920"/>
+                    <a:gd name="csY3" fmla="*/ 8634 h 56981"/>
+                    <a:gd name="csX4" fmla="*/ 28633 w 56920"/>
+                    <a:gd name="csY4" fmla="*/ 289 h 56981"/>
+                    <a:gd name="csX5" fmla="*/ 8508 w 56920"/>
+                    <a:gd name="csY5" fmla="*/ 8634 h 56981"/>
+                    <a:gd name="csX6" fmla="*/ 173 w 56920"/>
+                    <a:gd name="csY6" fmla="*/ 28780 h 56981"/>
+                    <a:gd name="csX7" fmla="*/ 8508 w 56920"/>
+                    <a:gd name="csY7" fmla="*/ 48926 h 56981"/>
+                    <a:gd name="csX8" fmla="*/ 28633 w 56920"/>
+                    <a:gd name="csY8" fmla="*/ 57271 h 56981"/>
+                  </a:gdLst>
+                  <a:ahLst/>
+                  <a:cxnLst>
+                    <a:cxn ang="0">
+                      <a:pos x="csX0" y="csY0"/>
+                    </a:cxn>
+                    <a:cxn ang="0">
+                      <a:pos x="csX1" y="csY1"/>
+                    </a:cxn>
+                    <a:cxn ang="0">
+                      <a:pos x="csX2" y="csY2"/>
+                    </a:cxn>
+                    <a:cxn ang="0">
+                      <a:pos x="csX3" y="csY3"/>
+                    </a:cxn>
+                    <a:cxn ang="0">
+                      <a:pos x="csX4" y="csY4"/>
+                    </a:cxn>
+                    <a:cxn ang="0">
+                      <a:pos x="csX5" y="csY5"/>
+                    </a:cxn>
+                    <a:cxn ang="0">
+                      <a:pos x="csX6" y="csY6"/>
+                    </a:cxn>
+                    <a:cxn ang="0">
+                      <a:pos x="csX7" y="csY7"/>
+                    </a:cxn>
+                    <a:cxn ang="0">
+                      <a:pos x="csX8" y="csY8"/>
+                    </a:cxn>
+                  </a:cxnLst>
+                  <a:rect l="l" t="t" r="r" b="b"/>
+                  <a:pathLst>
+                    <a:path w="56920" h="56981">
+                      <a:moveTo>
+                        <a:pt x="28633" y="57271"/>
+                      </a:moveTo>
+                      <a:cubicBezTo>
+                        <a:pt x="36180" y="57271"/>
+                        <a:pt x="43420" y="54269"/>
+                        <a:pt x="48757" y="48926"/>
+                      </a:cubicBezTo>
+                      <a:cubicBezTo>
+                        <a:pt x="54094" y="43583"/>
+                        <a:pt x="57093" y="36336"/>
+                        <a:pt x="57093" y="28780"/>
+                      </a:cubicBezTo>
+                      <a:cubicBezTo>
+                        <a:pt x="57093" y="21224"/>
+                        <a:pt x="54094" y="13977"/>
+                        <a:pt x="48757" y="8634"/>
+                      </a:cubicBezTo>
+                      <a:cubicBezTo>
+                        <a:pt x="43420" y="3291"/>
+                        <a:pt x="36180" y="289"/>
+                        <a:pt x="28633" y="289"/>
+                      </a:cubicBezTo>
+                      <a:cubicBezTo>
+                        <a:pt x="21085" y="289"/>
+                        <a:pt x="13845" y="3291"/>
+                        <a:pt x="8508" y="8634"/>
+                      </a:cubicBezTo>
+                      <a:cubicBezTo>
+                        <a:pt x="3171" y="13977"/>
+                        <a:pt x="173" y="21224"/>
+                        <a:pt x="173" y="28780"/>
+                      </a:cubicBezTo>
+                      <a:cubicBezTo>
+                        <a:pt x="173" y="36336"/>
+                        <a:pt x="3171" y="43583"/>
+                        <a:pt x="8508" y="48926"/>
+                      </a:cubicBezTo>
+                      <a:cubicBezTo>
+                        <a:pt x="13845" y="54269"/>
+                        <a:pt x="21085" y="57271"/>
+                        <a:pt x="28633" y="57271"/>
+                      </a:cubicBezTo>
+                      <a:close/>
+                    </a:path>
+                  </a:pathLst>
+                </a:custGeom>
+                <a:solidFill>
+                  <a:srgbClr val="F39C12"/>
+                </a:solidFill>
+                <a:ln w="10669" cap="flat">
+                  <a:solidFill>
+                    <a:srgbClr val="FFFFFF"/>
+                  </a:solidFill>
+                  <a:prstDash val="solid"/>
+                  <a:round/>
+                </a:ln>
+              </p:spPr>
+              <p:txBody>
+                <a:bodyPr/>
+                <a:lstStyle/>
+                <a:p>
+                  <a:endParaRPr lang="zh-CN" altLang="en-US">
+                    <a:latin typeface="Times New Roman" panose="02020603050405020304" pitchFamily="18" charset="0"/>
+                    <a:cs typeface="Times New Roman" panose="02020603050405020304" pitchFamily="18" charset="0"/>
+                  </a:endParaRPr>
+                </a:p>
+              </p:txBody>
+            </p:sp>
+            <p:sp>
+              <p:nvSpPr>
+                <p:cNvPr id="57" name="任意多边形: 形状 56">
+                  <a:extLst>
+                    <a:ext uri="{FF2B5EF4-FFF2-40B4-BE49-F238E27FC236}">
+                      <a16:creationId xmlns:a16="http://schemas.microsoft.com/office/drawing/2014/main" id="{F31EAE95-0E84-0917-B141-3EDEE7EEF4FE}"/>
+                    </a:ext>
+                  </a:extLst>
+                </p:cNvPr>
+                <p:cNvSpPr/>
+                <p:nvPr/>
+              </p:nvSpPr>
+              <p:spPr>
+                <a:xfrm>
+                  <a:off x="2495054" y="1685946"/>
+                  <a:ext cx="56920" cy="56981"/>
+                </a:xfrm>
+                <a:custGeom>
+                  <a:avLst/>
+                  <a:gdLst>
+                    <a:gd name="csX0" fmla="*/ 28765 w 56920"/>
+                    <a:gd name="csY0" fmla="*/ 57178 h 56981"/>
+                    <a:gd name="csX1" fmla="*/ 48889 w 56920"/>
+                    <a:gd name="csY1" fmla="*/ 48833 h 56981"/>
+                    <a:gd name="csX2" fmla="*/ 57225 w 56920"/>
+                    <a:gd name="csY2" fmla="*/ 28688 h 56981"/>
+                    <a:gd name="csX3" fmla="*/ 48889 w 56920"/>
+                    <a:gd name="csY3" fmla="*/ 8542 h 56981"/>
+                    <a:gd name="csX4" fmla="*/ 28765 w 56920"/>
+                    <a:gd name="csY4" fmla="*/ 197 h 56981"/>
+                    <a:gd name="csX5" fmla="*/ 8640 w 56920"/>
+                    <a:gd name="csY5" fmla="*/ 8542 h 56981"/>
+                    <a:gd name="csX6" fmla="*/ 305 w 56920"/>
+                    <a:gd name="csY6" fmla="*/ 28688 h 56981"/>
+                    <a:gd name="csX7" fmla="*/ 8640 w 56920"/>
+                    <a:gd name="csY7" fmla="*/ 48833 h 56981"/>
+                    <a:gd name="csX8" fmla="*/ 28765 w 56920"/>
+                    <a:gd name="csY8" fmla="*/ 57178 h 56981"/>
+                  </a:gdLst>
+                  <a:ahLst/>
+                  <a:cxnLst>
+                    <a:cxn ang="0">
+                      <a:pos x="csX0" y="csY0"/>
+                    </a:cxn>
+                    <a:cxn ang="0">
+                      <a:pos x="csX1" y="csY1"/>
+                    </a:cxn>
+                    <a:cxn ang="0">
+                      <a:pos x="csX2" y="csY2"/>
+                    </a:cxn>
+                    <a:cxn ang="0">
+                      <a:pos x="csX3" y="csY3"/>
+                    </a:cxn>
+                    <a:cxn ang="0">
+                      <a:pos x="csX4" y="csY4"/>
+                    </a:cxn>
+                    <a:cxn ang="0">
+                      <a:pos x="csX5" y="csY5"/>
+                    </a:cxn>
+                    <a:cxn ang="0">
+                      <a:pos x="csX6" y="csY6"/>
+                    </a:cxn>
+                    <a:cxn ang="0">
+                      <a:pos x="csX7" y="csY7"/>
+                    </a:cxn>
+                    <a:cxn ang="0">
+                      <a:pos x="csX8" y="csY8"/>
+                    </a:cxn>
+                  </a:cxnLst>
+                  <a:rect l="l" t="t" r="r" b="b"/>
+                  <a:pathLst>
+                    <a:path w="56920" h="56981">
+                      <a:moveTo>
+                        <a:pt x="28765" y="57178"/>
+                      </a:moveTo>
+                      <a:cubicBezTo>
+                        <a:pt x="36312" y="57178"/>
+                        <a:pt x="43552" y="54176"/>
+                        <a:pt x="48889" y="48833"/>
+                      </a:cubicBezTo>
+                      <a:cubicBezTo>
+                        <a:pt x="54226" y="43491"/>
+                        <a:pt x="57225" y="36243"/>
+                        <a:pt x="57225" y="28688"/>
+                      </a:cubicBezTo>
+                      <a:cubicBezTo>
+                        <a:pt x="57225" y="21132"/>
+                        <a:pt x="54226" y="13884"/>
+                        <a:pt x="48889" y="8542"/>
+                      </a:cubicBezTo>
+                      <a:cubicBezTo>
+                        <a:pt x="43552" y="3199"/>
+                        <a:pt x="36312" y="197"/>
+                        <a:pt x="28765" y="197"/>
+                      </a:cubicBezTo>
+                      <a:cubicBezTo>
+                        <a:pt x="21217" y="197"/>
+                        <a:pt x="13977" y="3199"/>
+                        <a:pt x="8640" y="8542"/>
+                      </a:cubicBezTo>
+                      <a:cubicBezTo>
+                        <a:pt x="3303" y="13884"/>
+                        <a:pt x="305" y="21132"/>
+                        <a:pt x="305" y="28688"/>
+                      </a:cubicBezTo>
+                      <a:cubicBezTo>
+                        <a:pt x="305" y="36243"/>
+                        <a:pt x="3303" y="43491"/>
+                        <a:pt x="8640" y="48833"/>
+                      </a:cubicBezTo>
+                      <a:cubicBezTo>
+                        <a:pt x="13977" y="54176"/>
+                        <a:pt x="21217" y="57178"/>
+                        <a:pt x="28765" y="57178"/>
+                      </a:cubicBezTo>
+                      <a:close/>
+                    </a:path>
+                  </a:pathLst>
+                </a:custGeom>
+                <a:solidFill>
+                  <a:srgbClr val="F39C12"/>
+                </a:solidFill>
+                <a:ln w="10669" cap="flat">
+                  <a:solidFill>
+                    <a:srgbClr val="FFFFFF"/>
+                  </a:solidFill>
+                  <a:prstDash val="solid"/>
+                  <a:round/>
+                </a:ln>
+              </p:spPr>
+              <p:txBody>
+                <a:bodyPr/>
+                <a:lstStyle/>
+                <a:p>
+                  <a:endParaRPr lang="zh-CN" altLang="en-US">
+                    <a:latin typeface="Times New Roman" panose="02020603050405020304" pitchFamily="18" charset="0"/>
+                    <a:cs typeface="Times New Roman" panose="02020603050405020304" pitchFamily="18" charset="0"/>
+                  </a:endParaRPr>
+                </a:p>
+              </p:txBody>
+            </p:sp>
+            <p:sp>
+              <p:nvSpPr>
+                <p:cNvPr id="63" name="文本框 62">
+                  <a:extLst>
+                    <a:ext uri="{FF2B5EF4-FFF2-40B4-BE49-F238E27FC236}">
+                      <a16:creationId xmlns:a16="http://schemas.microsoft.com/office/drawing/2014/main" id="{DF2EF69F-FCBA-5899-F8C5-000F173F3945}"/>
+                    </a:ext>
+                  </a:extLst>
+                </p:cNvPr>
+                <p:cNvSpPr txBox="1"/>
+                <p:nvPr/>
+              </p:nvSpPr>
+              <p:spPr>
+                <a:xfrm>
+                  <a:off x="2112974" y="1894732"/>
+                  <a:ext cx="308185" cy="369333"/>
+                </a:xfrm>
+                <a:prstGeom prst="rect">
+                  <a:avLst/>
+                </a:prstGeom>
+                <a:noFill/>
+              </p:spPr>
+              <p:txBody>
+                <a:bodyPr wrap="square" rtlCol="0">
+                  <a:spAutoFit/>
+                </a:bodyPr>
+                <a:lstStyle/>
+                <a:p>
+                  <a:r>
+                    <a:rPr lang="en-US" altLang="zh-CN" dirty="0">
+                      <a:solidFill>
+                        <a:srgbClr val="2980B9"/>
+                      </a:solidFill>
+                      <a:latin typeface="Times New Roman" panose="02020603050405020304" pitchFamily="18" charset="0"/>
+                      <a:cs typeface="Times New Roman" panose="02020603050405020304" pitchFamily="18" charset="0"/>
+                    </a:rPr>
+                    <a:t>θ</a:t>
+                  </a:r>
+                  <a:endParaRPr lang="zh-CN" altLang="en-US" dirty="0">
+                    <a:solidFill>
+                      <a:srgbClr val="2980B9"/>
+                    </a:solidFill>
+                    <a:latin typeface="Times New Roman" panose="02020603050405020304" pitchFamily="18" charset="0"/>
+                    <a:cs typeface="Times New Roman" panose="02020603050405020304" pitchFamily="18" charset="0"/>
+                  </a:endParaRPr>
+                </a:p>
+              </p:txBody>
+            </p:sp>
+            <p:sp>
+              <p:nvSpPr>
+                <p:cNvPr id="64" name="文本框 63">
+                  <a:extLst>
+                    <a:ext uri="{FF2B5EF4-FFF2-40B4-BE49-F238E27FC236}">
+                      <a16:creationId xmlns:a16="http://schemas.microsoft.com/office/drawing/2014/main" id="{02A4E35C-9AFB-E1DD-A1F2-D9815CC2F99F}"/>
+                    </a:ext>
+                  </a:extLst>
+                </p:cNvPr>
+                <p:cNvSpPr txBox="1"/>
+                <p:nvPr/>
+              </p:nvSpPr>
+              <p:spPr>
+                <a:xfrm>
+                  <a:off x="3007637" y="1071324"/>
+                  <a:ext cx="302773" cy="646331"/>
+                </a:xfrm>
+                <a:prstGeom prst="rect">
+                  <a:avLst/>
+                </a:prstGeom>
+                <a:noFill/>
+              </p:spPr>
+              <p:txBody>
+                <a:bodyPr wrap="square" rtlCol="0">
+                  <a:spAutoFit/>
+                </a:bodyPr>
+                <a:lstStyle/>
+                <a:p>
+                  <a:r>
+                    <a:rPr lang="el-GR" altLang="zh-CN" dirty="0">
+                      <a:ln/>
+                      <a:solidFill>
+                        <a:srgbClr val="E74C3C"/>
+                      </a:solidFill>
+                      <a:latin typeface="Times New Roman" panose="02020603050405020304" pitchFamily="18" charset="0"/>
+                      <a:cs typeface="Times New Roman" panose="02020603050405020304" pitchFamily="18" charset="0"/>
+                      <a:sym typeface="Times New Roman"/>
+                      <a:rtl val="0"/>
+                    </a:rPr>
+                    <a:t>δ</a:t>
+                  </a:r>
+                </a:p>
+                <a:p>
+                  <a:endParaRPr lang="zh-CN" altLang="en-US" b="1" dirty="0">
+                    <a:ln/>
+                    <a:solidFill>
+                      <a:srgbClr val="D62728"/>
+                    </a:solidFill>
+                    <a:latin typeface="Times New Roman" panose="02020603050405020304" pitchFamily="18" charset="0"/>
+                    <a:cs typeface="Times New Roman" panose="02020603050405020304" pitchFamily="18" charset="0"/>
+                    <a:sym typeface="Times New Roman"/>
+                    <a:rtl val="0"/>
+                  </a:endParaRPr>
+                </a:p>
+              </p:txBody>
+            </p:sp>
+          </p:grpSp>
+          <p:cxnSp>
+            <p:nvCxnSpPr>
+              <p:cNvPr id="67" name="直接箭头连接符 66">
+                <a:extLst>
+                  <a:ext uri="{FF2B5EF4-FFF2-40B4-BE49-F238E27FC236}">
+                    <a16:creationId xmlns:a16="http://schemas.microsoft.com/office/drawing/2014/main" id="{6CC099F6-75E3-1607-71F0-A524BCA06047}"/>
+                  </a:ext>
+                </a:extLst>
+              </p:cNvPr>
+              <p:cNvCxnSpPr>
+                <a:cxnSpLocks/>
+              </p:cNvCxnSpPr>
+              <p:nvPr/>
+            </p:nvCxnSpPr>
+            <p:spPr>
+              <a:xfrm flipV="1">
+                <a:off x="2529594" y="1539699"/>
+                <a:ext cx="706140" cy="175698"/>
+              </a:xfrm>
+              <a:prstGeom prst="straightConnector1">
+                <a:avLst/>
+              </a:prstGeom>
+              <a:ln w="12700">
+                <a:solidFill>
+                  <a:srgbClr val="FF0000"/>
+                </a:solidFill>
+                <a:tailEnd type="triangle"/>
+              </a:ln>
+            </p:spPr>
+            <p:style>
+              <a:lnRef idx="2">
+                <a:schemeClr val="accent1"/>
+              </a:lnRef>
+              <a:fillRef idx="0">
+                <a:schemeClr val="accent1"/>
+              </a:fillRef>
+              <a:effectRef idx="1">
+                <a:schemeClr val="accent1"/>
+              </a:effectRef>
+              <a:fontRef idx="minor">
+                <a:schemeClr val="tx1"/>
+              </a:fontRef>
+            </p:style>
+          </p:cxnSp>
+          <p:cxnSp>
+            <p:nvCxnSpPr>
+              <p:cNvPr id="69" name="直接箭头连接符 68">
+                <a:extLst>
+                  <a:ext uri="{FF2B5EF4-FFF2-40B4-BE49-F238E27FC236}">
+                    <a16:creationId xmlns:a16="http://schemas.microsoft.com/office/drawing/2014/main" id="{1CAD9C41-B951-01C2-400F-7BE47671BB6D}"/>
+                  </a:ext>
+                </a:extLst>
+              </p:cNvPr>
+              <p:cNvCxnSpPr>
+                <a:cxnSpLocks/>
+                <a:endCxn id="35" idx="1"/>
+              </p:cNvCxnSpPr>
+              <p:nvPr/>
+            </p:nvCxnSpPr>
+            <p:spPr>
+              <a:xfrm flipV="1">
+                <a:off x="2512098" y="1317661"/>
+                <a:ext cx="577462" cy="397736"/>
+              </a:xfrm>
+              <a:prstGeom prst="straightConnector1">
+                <a:avLst/>
+              </a:prstGeom>
+              <a:ln w="12700">
+                <a:solidFill>
+                  <a:srgbClr val="FF0000"/>
+                </a:solidFill>
+                <a:tailEnd type="triangle"/>
+              </a:ln>
+            </p:spPr>
+            <p:style>
+              <a:lnRef idx="2">
+                <a:schemeClr val="accent1"/>
+              </a:lnRef>
+              <a:fillRef idx="0">
+                <a:schemeClr val="accent1"/>
+              </a:fillRef>
+              <a:effectRef idx="1">
+                <a:schemeClr val="accent1"/>
+              </a:effectRef>
+              <a:fontRef idx="minor">
+                <a:schemeClr val="tx1"/>
+              </a:fontRef>
+            </p:style>
+          </p:cxnSp>
+          <p:sp>
+            <p:nvSpPr>
+              <p:cNvPr id="72" name="任意多边形: 形状 71">
+                <a:extLst>
+                  <a:ext uri="{FF2B5EF4-FFF2-40B4-BE49-F238E27FC236}">
+                    <a16:creationId xmlns:a16="http://schemas.microsoft.com/office/drawing/2014/main" id="{468ADD6A-027A-8E06-DAE8-3FE815461600}"/>
+                  </a:ext>
+                </a:extLst>
+              </p:cNvPr>
+              <p:cNvSpPr/>
+              <p:nvPr/>
+            </p:nvSpPr>
+            <p:spPr>
+              <a:xfrm>
+                <a:off x="2903888" y="1446879"/>
+                <a:ext cx="72467" cy="143674"/>
+              </a:xfrm>
+              <a:custGeom>
+                <a:avLst/>
+                <a:gdLst>
+                  <a:gd name="csX0" fmla="*/ 103762 w 103762"/>
+                  <a:gd name="csY0" fmla="*/ 329445 h 329445"/>
+                  <a:gd name="csX1" fmla="*/ 77207 w 103762"/>
+                  <a:gd name="csY1" fmla="*/ 156729 h 329445"/>
+                  <a:gd name="csX2" fmla="*/ 0 w 103762"/>
+                  <a:gd name="csY2" fmla="*/ 0 h 329445"/>
+                </a:gdLst>
+                <a:ahLst/>
+                <a:cxnLst>
+                  <a:cxn ang="0">
+                    <a:pos x="csX0" y="csY0"/>
+                  </a:cxn>
+                  <a:cxn ang="0">
+                    <a:pos x="csX1" y="csY1"/>
+                  </a:cxn>
+                  <a:cxn ang="0">
+                    <a:pos x="csX2" y="csY2"/>
+                  </a:cxn>
+                </a:cxnLst>
+                <a:rect l="l" t="t" r="r" b="b"/>
+                <a:pathLst>
+                  <a:path w="103762" h="329445">
+                    <a:moveTo>
+                      <a:pt x="103762" y="329445"/>
+                    </a:moveTo>
+                    <a:cubicBezTo>
+                      <a:pt x="103762" y="270855"/>
+                      <a:pt x="94807" y="212608"/>
+                      <a:pt x="77207" y="156729"/>
+                    </a:cubicBezTo>
+                    <a:cubicBezTo>
+                      <a:pt x="59608" y="100850"/>
+                      <a:pt x="33570" y="47995"/>
+                      <a:pt x="0" y="0"/>
+                    </a:cubicBezTo>
+                  </a:path>
+                </a:pathLst>
+              </a:custGeom>
+              <a:noFill/>
+              <a:ln w="14226" cap="flat">
+                <a:solidFill>
+                  <a:srgbClr val="E74C3C"/>
+                </a:solidFill>
+                <a:prstDash val="solid"/>
+                <a:miter/>
+              </a:ln>
+            </p:spPr>
+            <p:txBody>
+              <a:bodyPr/>
+              <a:lstStyle/>
+              <a:p>
+                <a:endParaRPr lang="zh-CN" altLang="en-US">
+                  <a:latin typeface="Times New Roman" panose="02020603050405020304" pitchFamily="18" charset="0"/>
+                  <a:cs typeface="Times New Roman" panose="02020603050405020304" pitchFamily="18" charset="0"/>
+                </a:endParaRPr>
+              </a:p>
+            </p:txBody>
+          </p:sp>
+          <p:sp>
+            <p:nvSpPr>
+              <p:cNvPr id="73" name="文本框 72">
+                <a:extLst>
+                  <a:ext uri="{FF2B5EF4-FFF2-40B4-BE49-F238E27FC236}">
+                    <a16:creationId xmlns:a16="http://schemas.microsoft.com/office/drawing/2014/main" id="{4992B940-4AD7-A6E6-1CE4-FE690504ADF2}"/>
+                  </a:ext>
+                </a:extLst>
+              </p:cNvPr>
+              <p:cNvSpPr txBox="1"/>
+              <p:nvPr/>
+            </p:nvSpPr>
+            <p:spPr>
+              <a:xfrm>
+                <a:off x="1426796" y="1001195"/>
+                <a:ext cx="308185" cy="369332"/>
+              </a:xfrm>
+              <a:prstGeom prst="rect">
+                <a:avLst/>
+              </a:prstGeom>
+              <a:noFill/>
+            </p:spPr>
+            <p:txBody>
+              <a:bodyPr wrap="square" rtlCol="0">
+                <a:spAutoFit/>
+              </a:bodyPr>
+              <a:lstStyle/>
+              <a:p>
+                <a:r>
+                  <a:rPr lang="en-US" altLang="zh-CN" dirty="0">
+                    <a:solidFill>
+                      <a:srgbClr val="7F8C8D"/>
+                    </a:solidFill>
+                    <a:latin typeface="Times New Roman" panose="02020603050405020304" pitchFamily="18" charset="0"/>
+                    <a:cs typeface="Times New Roman" panose="02020603050405020304" pitchFamily="18" charset="0"/>
+                  </a:rPr>
+                  <a:t>L</a:t>
+                </a:r>
+                <a:endParaRPr lang="zh-CN" altLang="en-US" dirty="0">
+                  <a:solidFill>
+                    <a:srgbClr val="7F8C8D"/>
+                  </a:solidFill>
+                  <a:latin typeface="Times New Roman" panose="02020603050405020304" pitchFamily="18" charset="0"/>
+                  <a:cs typeface="Times New Roman" panose="02020603050405020304" pitchFamily="18" charset="0"/>
+                </a:endParaRPr>
+              </a:p>
+            </p:txBody>
+          </p:sp>
+          <p:cxnSp>
+            <p:nvCxnSpPr>
+              <p:cNvPr id="77" name="直接箭头连接符 76">
+                <a:extLst>
+                  <a:ext uri="{FF2B5EF4-FFF2-40B4-BE49-F238E27FC236}">
+                    <a16:creationId xmlns:a16="http://schemas.microsoft.com/office/drawing/2014/main" id="{7CAB2DBF-139B-EAF2-C2FA-5E097E236460}"/>
+                  </a:ext>
+                </a:extLst>
+              </p:cNvPr>
+              <p:cNvCxnSpPr>
+                <a:cxnSpLocks/>
+                <a:endCxn id="5" idx="3"/>
+              </p:cNvCxnSpPr>
+              <p:nvPr/>
+            </p:nvCxnSpPr>
+            <p:spPr>
+              <a:xfrm flipH="1" flipV="1">
+                <a:off x="748441" y="480949"/>
+                <a:ext cx="17298" cy="2739504"/>
+              </a:xfrm>
+              <a:prstGeom prst="straightConnector1">
+                <a:avLst/>
+              </a:prstGeom>
+              <a:ln>
+                <a:tailEnd type="triangle"/>
+              </a:ln>
+            </p:spPr>
+            <p:style>
+              <a:lnRef idx="2">
+                <a:schemeClr val="dk1"/>
+              </a:lnRef>
+              <a:fillRef idx="0">
+                <a:schemeClr val="dk1"/>
+              </a:fillRef>
+              <a:effectRef idx="1">
+                <a:schemeClr val="dk1"/>
+              </a:effectRef>
+              <a:fontRef idx="minor">
+                <a:schemeClr val="tx1"/>
+              </a:fontRef>
+            </p:style>
+          </p:cxnSp>
+          <p:cxnSp>
+            <p:nvCxnSpPr>
+              <p:cNvPr id="80" name="直接箭头连接符 79">
+                <a:extLst>
+                  <a:ext uri="{FF2B5EF4-FFF2-40B4-BE49-F238E27FC236}">
+                    <a16:creationId xmlns:a16="http://schemas.microsoft.com/office/drawing/2014/main" id="{3D278563-A38B-C7C1-D1D9-79DE8BE7652C}"/>
+                  </a:ext>
+                </a:extLst>
+              </p:cNvPr>
+              <p:cNvCxnSpPr>
+                <a:cxnSpLocks/>
+              </p:cNvCxnSpPr>
+              <p:nvPr/>
+            </p:nvCxnSpPr>
+            <p:spPr>
+              <a:xfrm>
+                <a:off x="748441" y="3220453"/>
+                <a:ext cx="2607442" cy="40105"/>
+              </a:xfrm>
+              <a:prstGeom prst="straightConnector1">
+                <a:avLst/>
+              </a:prstGeom>
+              <a:ln>
+                <a:tailEnd type="triangle"/>
+              </a:ln>
+            </p:spPr>
+            <p:style>
+              <a:lnRef idx="2">
+                <a:schemeClr val="dk1"/>
+              </a:lnRef>
+              <a:fillRef idx="0">
+                <a:schemeClr val="dk1"/>
+              </a:fillRef>
+              <a:effectRef idx="1">
+                <a:schemeClr val="dk1"/>
+              </a:effectRef>
+              <a:fontRef idx="minor">
+                <a:schemeClr val="tx1"/>
+              </a:fontRef>
+            </p:style>
+          </p:cxnSp>
+        </p:grpSp>
+        <p:sp>
+          <p:nvSpPr>
+            <p:cNvPr id="84" name="文本框 83">
+              <a:extLst>
+                <a:ext uri="{FF2B5EF4-FFF2-40B4-BE49-F238E27FC236}">
+                  <a16:creationId xmlns:a16="http://schemas.microsoft.com/office/drawing/2014/main" id="{7BF70927-0F64-3AF8-1D8D-A3F4595FD78C}"/>
+                </a:ext>
+              </a:extLst>
+            </p:cNvPr>
+            <p:cNvSpPr txBox="1"/>
+            <p:nvPr/>
+          </p:nvSpPr>
+          <p:spPr>
+            <a:xfrm>
+              <a:off x="2313792" y="2189748"/>
+              <a:ext cx="197661" cy="369332"/>
+            </a:xfrm>
+            <a:prstGeom prst="rect">
+              <a:avLst/>
+            </a:prstGeom>
             <a:noFill/>
-          </a:ln>
-        </p:spPr>
-        <p:style>
-          <a:lnRef idx="1">
-            <a:schemeClr val="accent1"/>
-          </a:lnRef>
-          <a:fillRef idx="3">
-            <a:schemeClr val="accent1"/>
-          </a:fillRef>
-          <a:effectRef idx="2">
-            <a:schemeClr val="accent1"/>
-          </a:effectRef>
-          <a:fontRef idx="minor">
-            <a:schemeClr val="lt1"/>
-          </a:fontRef>
-        </p:style>
-        <p:txBody>
-          <a:bodyPr rtlCol="0" anchor="ctr"/>
-          <a:lstStyle/>
-          <a:p>
-            <a:pPr algn="ctr"/>
-          </a:p>
-        </p:txBody>
-      </p:sp>
-      <p:sp>
-        <p:nvSpPr>
-          <p:cNvPr id="9" name="Oval 8"/>
-          <p:cNvSpPr/>
-          <p:nvPr/>
-        </p:nvSpPr>
-        <p:spPr>
-          <a:xfrm>
-            <a:off x="5328238" y="2333989"/>
-            <a:ext cx="73152" cy="73152"/>
-          </a:xfrm>
-          <a:prstGeom prst="ellipse">
-            <a:avLst/>
-          </a:prstGeom>
-          <a:solidFill>
-            <a:srgbClr val="000000"/>
-          </a:solidFill>
-          <a:ln>
+          </p:spPr>
+          <p:txBody>
+            <a:bodyPr wrap="square" rtlCol="0">
+              <a:spAutoFit/>
+            </a:bodyPr>
+            <a:lstStyle/>
+            <a:p>
+              <a:r>
+                <a:rPr lang="en-US" altLang="zh-CN" dirty="0">
+                  <a:latin typeface="Times New Roman" panose="02020603050405020304" pitchFamily="18" charset="0"/>
+                  <a:cs typeface="Times New Roman" panose="02020603050405020304" pitchFamily="18" charset="0"/>
+                </a:rPr>
+                <a:t>X</a:t>
+              </a:r>
+              <a:endParaRPr lang="zh-CN" altLang="en-US" dirty="0">
+                <a:latin typeface="Times New Roman" panose="02020603050405020304" pitchFamily="18" charset="0"/>
+                <a:cs typeface="Times New Roman" panose="02020603050405020304" pitchFamily="18" charset="0"/>
+              </a:endParaRPr>
+            </a:p>
+          </p:txBody>
+        </p:sp>
+        <p:sp>
+          <p:nvSpPr>
+            <p:cNvPr id="85" name="文本框 84">
+              <a:extLst>
+                <a:ext uri="{FF2B5EF4-FFF2-40B4-BE49-F238E27FC236}">
+                  <a16:creationId xmlns:a16="http://schemas.microsoft.com/office/drawing/2014/main" id="{DD950ECC-50F5-F23E-4B57-8152095577D9}"/>
+                </a:ext>
+              </a:extLst>
+            </p:cNvPr>
+            <p:cNvSpPr txBox="1"/>
+            <p:nvPr/>
+          </p:nvSpPr>
+          <p:spPr>
+            <a:xfrm>
+              <a:off x="425239" y="264695"/>
+              <a:ext cx="197661" cy="369332"/>
+            </a:xfrm>
+            <a:prstGeom prst="rect">
+              <a:avLst/>
+            </a:prstGeom>
             <a:noFill/>
-          </a:ln>
-        </p:spPr>
-        <p:style>
-          <a:lnRef idx="1">
-            <a:schemeClr val="accent1"/>
-          </a:lnRef>
-          <a:fillRef idx="3">
-            <a:schemeClr val="accent1"/>
-          </a:fillRef>
-          <a:effectRef idx="2">
-            <a:schemeClr val="accent1"/>
-          </a:effectRef>
-          <a:fontRef idx="minor">
-            <a:schemeClr val="lt1"/>
-          </a:fontRef>
-        </p:style>
-        <p:txBody>
-          <a:bodyPr rtlCol="0" anchor="ctr"/>
-          <a:lstStyle/>
-          <a:p>
-            <a:pPr algn="ctr"/>
-          </a:p>
-        </p:txBody>
-      </p:sp>
-      <p:cxnSp>
-        <p:nvCxnSpPr>
-          <p:cNvPr id="0" name=""/>
-          <p:cNvCxnSpPr/>
-          <p:nvPr/>
-        </p:nvCxnSpPr>
-        <p:spPr>
-          <a:xfrm flipH="0" flipV="0">
-            <a:off x="2743200" y="4206240"/>
-            <a:ext cx="1645919" cy="914"/>
-          </a:xfrm>
-          <a:prstGeom prst="line">
-            <a:avLst/>
-          </a:prstGeom>
-          <a:ln w="12700">
-            <a:solidFill>
-              <a:srgbClr val="000000"/>
-            </a:solidFill>
-            <a:prstDash val="dash"/>
-            <a:tailEnd type="arrow" w="med" len="med"/>
-          </a:ln>
-        </p:spPr>
-      </p:cxnSp>
-      <p:cxnSp>
-        <p:nvCxnSpPr>
-          <p:cNvPr id="0" name=""/>
-          <p:cNvCxnSpPr/>
-          <p:nvPr/>
-        </p:nvCxnSpPr>
-        <p:spPr>
-          <a:xfrm flipH="1" flipV="1">
-            <a:off x="3748206" y="4165289"/>
-            <a:ext cx="914" cy="40950"/>
-          </a:xfrm>
-          <a:prstGeom prst="line">
-            <a:avLst/>
-          </a:prstGeom>
-          <a:ln w="12700">
-            <a:solidFill>
-              <a:srgbClr val="000000"/>
-            </a:solidFill>
-          </a:ln>
-        </p:spPr>
-      </p:cxnSp>
-      <p:cxnSp>
-        <p:nvCxnSpPr>
-          <p:cNvPr id="0" name=""/>
-          <p:cNvCxnSpPr/>
-          <p:nvPr/>
-        </p:nvCxnSpPr>
-        <p:spPr>
-          <a:xfrm flipH="1" flipV="1">
-            <a:off x="3745705" y="4124406"/>
-            <a:ext cx="2500" cy="40882"/>
-          </a:xfrm>
-          <a:prstGeom prst="line">
-            <a:avLst/>
-          </a:prstGeom>
-          <a:ln w="12700">
-            <a:solidFill>
-              <a:srgbClr val="000000"/>
-            </a:solidFill>
-          </a:ln>
-        </p:spPr>
-      </p:cxnSp>
-      <p:cxnSp>
-        <p:nvCxnSpPr>
-          <p:cNvPr id="0" name=""/>
-          <p:cNvCxnSpPr/>
-          <p:nvPr/>
-        </p:nvCxnSpPr>
-        <p:spPr>
-          <a:xfrm flipH="1" flipV="1">
-            <a:off x="3741542" y="4083658"/>
-            <a:ext cx="4162" cy="40747"/>
-          </a:xfrm>
-          <a:prstGeom prst="line">
-            <a:avLst/>
-          </a:prstGeom>
-          <a:ln w="12700">
-            <a:solidFill>
-              <a:srgbClr val="000000"/>
-            </a:solidFill>
-          </a:ln>
-        </p:spPr>
-      </p:cxnSp>
-      <p:cxnSp>
-        <p:nvCxnSpPr>
-          <p:cNvPr id="0" name=""/>
-          <p:cNvCxnSpPr/>
-          <p:nvPr/>
-        </p:nvCxnSpPr>
-        <p:spPr>
-          <a:xfrm flipH="1" flipV="1">
-            <a:off x="3735724" y="4043114"/>
-            <a:ext cx="5818" cy="40543"/>
-          </a:xfrm>
-          <a:prstGeom prst="line">
-            <a:avLst/>
-          </a:prstGeom>
-          <a:ln w="12700">
-            <a:solidFill>
-              <a:srgbClr val="000000"/>
-            </a:solidFill>
-          </a:ln>
-        </p:spPr>
-      </p:cxnSp>
-      <p:cxnSp>
-        <p:nvCxnSpPr>
-          <p:cNvPr id="0" name=""/>
-          <p:cNvCxnSpPr/>
-          <p:nvPr/>
-        </p:nvCxnSpPr>
-        <p:spPr>
-          <a:xfrm flipH="1" flipV="1">
-            <a:off x="3728259" y="4002841"/>
-            <a:ext cx="7464" cy="40273"/>
-          </a:xfrm>
-          <a:prstGeom prst="line">
-            <a:avLst/>
-          </a:prstGeom>
-          <a:ln w="12700">
-            <a:solidFill>
-              <a:srgbClr val="000000"/>
-            </a:solidFill>
-          </a:ln>
-        </p:spPr>
-      </p:cxnSp>
-      <p:cxnSp>
-        <p:nvCxnSpPr>
-          <p:cNvPr id="0" name=""/>
-          <p:cNvCxnSpPr/>
-          <p:nvPr/>
-        </p:nvCxnSpPr>
-        <p:spPr>
-          <a:xfrm flipH="1" flipV="1">
-            <a:off x="3719162" y="3962905"/>
-            <a:ext cx="9097" cy="39936"/>
-          </a:xfrm>
-          <a:prstGeom prst="line">
-            <a:avLst/>
-          </a:prstGeom>
-          <a:ln w="12700">
-            <a:solidFill>
-              <a:srgbClr val="000000"/>
-            </a:solidFill>
-          </a:ln>
-        </p:spPr>
-      </p:cxnSp>
-      <p:cxnSp>
-        <p:nvCxnSpPr>
-          <p:cNvPr id="0" name=""/>
-          <p:cNvCxnSpPr/>
-          <p:nvPr/>
-        </p:nvCxnSpPr>
-        <p:spPr>
-          <a:xfrm flipH="1" flipV="1">
-            <a:off x="3708446" y="3923372"/>
-            <a:ext cx="10716" cy="39532"/>
-          </a:xfrm>
-          <a:prstGeom prst="line">
-            <a:avLst/>
-          </a:prstGeom>
-          <a:ln w="12700">
-            <a:solidFill>
-              <a:srgbClr val="000000"/>
-            </a:solidFill>
-          </a:ln>
-        </p:spPr>
-      </p:cxnSp>
-      <p:cxnSp>
-        <p:nvCxnSpPr>
-          <p:cNvPr id="0" name=""/>
-          <p:cNvCxnSpPr/>
-          <p:nvPr/>
-        </p:nvCxnSpPr>
-        <p:spPr>
-          <a:xfrm flipH="1" flipV="1">
-            <a:off x="3696129" y="3884308"/>
-            <a:ext cx="12316" cy="39063"/>
-          </a:xfrm>
-          <a:prstGeom prst="line">
-            <a:avLst/>
-          </a:prstGeom>
-          <a:ln w="12700">
-            <a:solidFill>
-              <a:srgbClr val="000000"/>
-            </a:solidFill>
-          </a:ln>
-        </p:spPr>
-      </p:cxnSp>
-      <p:cxnSp>
-        <p:nvCxnSpPr>
-          <p:cNvPr id="0" name=""/>
-          <p:cNvCxnSpPr/>
-          <p:nvPr/>
-        </p:nvCxnSpPr>
-        <p:spPr>
-          <a:xfrm flipH="1" flipV="1">
-            <a:off x="3682232" y="3845779"/>
-            <a:ext cx="13896" cy="38529"/>
-          </a:xfrm>
-          <a:prstGeom prst="line">
-            <a:avLst/>
-          </a:prstGeom>
-          <a:ln w="12700">
-            <a:solidFill>
-              <a:srgbClr val="000000"/>
-            </a:solidFill>
-          </a:ln>
-        </p:spPr>
-      </p:cxnSp>
-      <p:cxnSp>
-        <p:nvCxnSpPr>
-          <p:cNvPr id="0" name=""/>
-          <p:cNvCxnSpPr/>
-          <p:nvPr/>
-        </p:nvCxnSpPr>
-        <p:spPr>
-          <a:xfrm flipH="1" flipV="1">
-            <a:off x="3666778" y="3807847"/>
-            <a:ext cx="15454" cy="37932"/>
-          </a:xfrm>
-          <a:prstGeom prst="line">
-            <a:avLst/>
-          </a:prstGeom>
-          <a:ln w="12700">
-            <a:solidFill>
-              <a:srgbClr val="000000"/>
-            </a:solidFill>
-          </a:ln>
-        </p:spPr>
-      </p:cxnSp>
-      <p:cxnSp>
-        <p:nvCxnSpPr>
-          <p:cNvPr id="0" name=""/>
-          <p:cNvCxnSpPr/>
-          <p:nvPr/>
-        </p:nvCxnSpPr>
-        <p:spPr>
-          <a:xfrm flipH="1" flipV="1">
-            <a:off x="3649792" y="3770575"/>
-            <a:ext cx="16985" cy="37271"/>
-          </a:xfrm>
-          <a:prstGeom prst="line">
-            <a:avLst/>
-          </a:prstGeom>
-          <a:ln w="12700">
-            <a:solidFill>
-              <a:srgbClr val="000000"/>
-            </a:solidFill>
-          </a:ln>
-        </p:spPr>
-      </p:cxnSp>
-      <p:cxnSp>
-        <p:nvCxnSpPr>
-          <p:cNvPr id="0" name=""/>
-          <p:cNvCxnSpPr/>
-          <p:nvPr/>
-        </p:nvCxnSpPr>
-        <p:spPr>
-          <a:xfrm flipH="1" flipV="1">
-            <a:off x="3631304" y="3734026"/>
-            <a:ext cx="18488" cy="36548"/>
-          </a:xfrm>
-          <a:prstGeom prst="line">
-            <a:avLst/>
-          </a:prstGeom>
-          <a:ln w="12700">
-            <a:solidFill>
-              <a:srgbClr val="000000"/>
-            </a:solidFill>
-          </a:ln>
-        </p:spPr>
-      </p:cxnSp>
-      <p:cxnSp>
-        <p:nvCxnSpPr>
-          <p:cNvPr id="0" name=""/>
-          <p:cNvCxnSpPr/>
-          <p:nvPr/>
-        </p:nvCxnSpPr>
-        <p:spPr>
-          <a:xfrm flipH="1" flipV="1">
-            <a:off x="3611342" y="3698260"/>
-            <a:ext cx="19961" cy="35765"/>
-          </a:xfrm>
-          <a:prstGeom prst="line">
-            <a:avLst/>
-          </a:prstGeom>
-          <a:ln w="12700">
-            <a:solidFill>
-              <a:srgbClr val="000000"/>
-            </a:solidFill>
-          </a:ln>
-        </p:spPr>
-      </p:cxnSp>
-      <p:cxnSp>
-        <p:nvCxnSpPr>
-          <p:cNvPr id="0" name=""/>
-          <p:cNvCxnSpPr/>
-          <p:nvPr/>
-        </p:nvCxnSpPr>
-        <p:spPr>
-          <a:xfrm flipH="1" flipV="1">
-            <a:off x="3589941" y="3663337"/>
-            <a:ext cx="21401" cy="34923"/>
-          </a:xfrm>
-          <a:prstGeom prst="line">
-            <a:avLst/>
-          </a:prstGeom>
-          <a:ln w="12700">
-            <a:solidFill>
-              <a:srgbClr val="000000"/>
-            </a:solidFill>
-          </a:ln>
-        </p:spPr>
-      </p:cxnSp>
-      <p:cxnSp>
-        <p:nvCxnSpPr>
-          <p:cNvPr id="0" name=""/>
-          <p:cNvCxnSpPr/>
-          <p:nvPr/>
-        </p:nvCxnSpPr>
-        <p:spPr>
-          <a:xfrm flipH="1" flipV="1">
-            <a:off x="3567135" y="3629313"/>
-            <a:ext cx="22805" cy="34023"/>
-          </a:xfrm>
-          <a:prstGeom prst="line">
-            <a:avLst/>
-          </a:prstGeom>
-          <a:ln w="12700">
-            <a:solidFill>
-              <a:srgbClr val="000000"/>
-            </a:solidFill>
-          </a:ln>
-        </p:spPr>
-      </p:cxnSp>
-      <p:sp>
-        <p:nvSpPr>
-          <p:cNvPr id="10" name="TextBox 9"/>
-          <p:cNvSpPr txBox="1"/>
-          <p:nvPr/>
-        </p:nvSpPr>
-        <p:spPr>
-          <a:xfrm>
-            <a:off x="3689790" y="3729848"/>
-            <a:ext cx="548640" cy="365760"/>
-          </a:xfrm>
-          <a:prstGeom prst="rect">
-            <a:avLst/>
-          </a:prstGeom>
-          <a:noFill/>
-        </p:spPr>
-        <p:txBody>
-          <a:bodyPr wrap="none">
-            <a:spAutoFit/>
-          </a:bodyPr>
-          <a:lstStyle/>
-          <a:p>
-            <a:pPr algn="ctr"/>
-            <a:r>
-              <a:rPr sz="1600" b="0" i="1">
-                <a:solidFill>
-                  <a:srgbClr val="000000"/>
-                </a:solidFill>
-                <a:latin typeface="Times New Roman"/>
-              </a:rPr>
-              <a:t>θ</a:t>
-            </a:r>
-          </a:p>
-        </p:txBody>
-      </p:sp>
-      <p:cxnSp>
-        <p:nvCxnSpPr>
-          <p:cNvPr id="0" name=""/>
-          <p:cNvCxnSpPr/>
-          <p:nvPr/>
-        </p:nvCxnSpPr>
-        <p:spPr>
-          <a:xfrm flipH="0" flipV="1">
-            <a:off x="5364814" y="1531400"/>
-            <a:ext cx="1198452" cy="839165"/>
-          </a:xfrm>
-          <a:prstGeom prst="line">
-            <a:avLst/>
-          </a:prstGeom>
-          <a:ln w="12700">
-            <a:solidFill>
-              <a:srgbClr val="000000"/>
-            </a:solidFill>
-            <a:prstDash val="dash"/>
-            <a:tailEnd type="arrow" w="med" len="med"/>
-          </a:ln>
-        </p:spPr>
-      </p:cxnSp>
-      <p:cxnSp>
-        <p:nvCxnSpPr>
-          <p:cNvPr id="0" name=""/>
-          <p:cNvCxnSpPr/>
-          <p:nvPr/>
-        </p:nvCxnSpPr>
-        <p:spPr>
-          <a:xfrm flipH="0" flipV="1">
-            <a:off x="5364814" y="2116511"/>
-            <a:ext cx="1440813" cy="254054"/>
-          </a:xfrm>
-          <a:prstGeom prst="line">
-            <a:avLst/>
-          </a:prstGeom>
-          <a:ln w="12700">
-            <a:solidFill>
-              <a:srgbClr val="000000"/>
-            </a:solidFill>
-            <a:prstDash val="dash"/>
-            <a:tailEnd type="arrow" w="med" len="med"/>
-          </a:ln>
-        </p:spPr>
-      </p:cxnSp>
-      <p:cxnSp>
-        <p:nvCxnSpPr>
-          <p:cNvPr id="0" name=""/>
-          <p:cNvCxnSpPr/>
-          <p:nvPr/>
-        </p:nvCxnSpPr>
-        <p:spPr>
-          <a:xfrm flipH="1" flipV="1">
-            <a:off x="6169540" y="2198292"/>
-            <a:ext cx="5730" cy="29368"/>
-          </a:xfrm>
-          <a:prstGeom prst="line">
-            <a:avLst/>
-          </a:prstGeom>
-          <a:ln w="12700">
-            <a:solidFill>
-              <a:srgbClr val="000000"/>
-            </a:solidFill>
-          </a:ln>
-        </p:spPr>
-      </p:cxnSp>
-      <p:cxnSp>
-        <p:nvCxnSpPr>
-          <p:cNvPr id="0" name=""/>
-          <p:cNvCxnSpPr/>
-          <p:nvPr/>
-        </p:nvCxnSpPr>
-        <p:spPr>
-          <a:xfrm flipH="1" flipV="1">
-            <a:off x="6162746" y="2169151"/>
-            <a:ext cx="6794" cy="29140"/>
-          </a:xfrm>
-          <a:prstGeom prst="line">
-            <a:avLst/>
-          </a:prstGeom>
-          <a:ln w="12700">
-            <a:solidFill>
-              <a:srgbClr val="000000"/>
-            </a:solidFill>
-          </a:ln>
-        </p:spPr>
-      </p:cxnSp>
-      <p:cxnSp>
-        <p:nvCxnSpPr>
-          <p:cNvPr id="0" name=""/>
-          <p:cNvCxnSpPr/>
-          <p:nvPr/>
-        </p:nvCxnSpPr>
-        <p:spPr>
-          <a:xfrm flipH="1" flipV="1">
-            <a:off x="6154896" y="2140277"/>
-            <a:ext cx="7849" cy="28874"/>
-          </a:xfrm>
-          <a:prstGeom prst="line">
-            <a:avLst/>
-          </a:prstGeom>
-          <a:ln w="12700">
-            <a:solidFill>
-              <a:srgbClr val="000000"/>
-            </a:solidFill>
-          </a:ln>
-        </p:spPr>
-      </p:cxnSp>
-      <p:cxnSp>
-        <p:nvCxnSpPr>
-          <p:cNvPr id="0" name=""/>
-          <p:cNvCxnSpPr/>
-          <p:nvPr/>
-        </p:nvCxnSpPr>
-        <p:spPr>
-          <a:xfrm flipH="1" flipV="1">
-            <a:off x="6146002" y="2111708"/>
-            <a:ext cx="8893" cy="28569"/>
-          </a:xfrm>
-          <a:prstGeom prst="line">
-            <a:avLst/>
-          </a:prstGeom>
-          <a:ln w="12700">
-            <a:solidFill>
-              <a:srgbClr val="000000"/>
-            </a:solidFill>
-          </a:ln>
-        </p:spPr>
-      </p:cxnSp>
-      <p:cxnSp>
-        <p:nvCxnSpPr>
-          <p:cNvPr id="0" name=""/>
-          <p:cNvCxnSpPr/>
-          <p:nvPr/>
-        </p:nvCxnSpPr>
-        <p:spPr>
-          <a:xfrm flipH="1" flipV="1">
-            <a:off x="6136076" y="2083480"/>
-            <a:ext cx="9926" cy="28227"/>
-          </a:xfrm>
-          <a:prstGeom prst="line">
-            <a:avLst/>
-          </a:prstGeom>
-          <a:ln w="12700">
-            <a:solidFill>
-              <a:srgbClr val="000000"/>
-            </a:solidFill>
-          </a:ln>
-        </p:spPr>
-      </p:cxnSp>
-      <p:cxnSp>
-        <p:nvCxnSpPr>
-          <p:cNvPr id="0" name=""/>
-          <p:cNvCxnSpPr/>
-          <p:nvPr/>
-        </p:nvCxnSpPr>
-        <p:spPr>
-          <a:xfrm flipH="1" flipV="1">
-            <a:off x="6125130" y="2055632"/>
-            <a:ext cx="10946" cy="27847"/>
-          </a:xfrm>
-          <a:prstGeom prst="line">
-            <a:avLst/>
-          </a:prstGeom>
-          <a:ln w="12700">
-            <a:solidFill>
-              <a:srgbClr val="000000"/>
-            </a:solidFill>
-          </a:ln>
-        </p:spPr>
-      </p:cxnSp>
-      <p:cxnSp>
-        <p:nvCxnSpPr>
-          <p:cNvPr id="0" name=""/>
-          <p:cNvCxnSpPr/>
-          <p:nvPr/>
-        </p:nvCxnSpPr>
-        <p:spPr>
-          <a:xfrm flipH="1" flipV="1">
-            <a:off x="6113178" y="2028201"/>
-            <a:ext cx="11951" cy="27431"/>
-          </a:xfrm>
-          <a:prstGeom prst="line">
-            <a:avLst/>
-          </a:prstGeom>
-          <a:ln w="12700">
-            <a:solidFill>
-              <a:srgbClr val="000000"/>
-            </a:solidFill>
-          </a:ln>
-        </p:spPr>
-      </p:cxnSp>
-      <p:cxnSp>
-        <p:nvCxnSpPr>
-          <p:cNvPr id="0" name=""/>
-          <p:cNvCxnSpPr/>
-          <p:nvPr/>
-        </p:nvCxnSpPr>
-        <p:spPr>
-          <a:xfrm flipH="1" flipV="1">
-            <a:off x="6100238" y="2001222"/>
-            <a:ext cx="12940" cy="26979"/>
-          </a:xfrm>
-          <a:prstGeom prst="line">
-            <a:avLst/>
-          </a:prstGeom>
-          <a:ln w="12700">
-            <a:solidFill>
-              <a:srgbClr val="000000"/>
-            </a:solidFill>
-          </a:ln>
-        </p:spPr>
-      </p:cxnSp>
-      <p:cxnSp>
-        <p:nvCxnSpPr>
-          <p:cNvPr id="0" name=""/>
-          <p:cNvCxnSpPr/>
-          <p:nvPr/>
-        </p:nvCxnSpPr>
-        <p:spPr>
-          <a:xfrm flipH="1" flipV="1">
-            <a:off x="6086325" y="1974731"/>
-            <a:ext cx="13912" cy="26490"/>
-          </a:xfrm>
-          <a:prstGeom prst="line">
-            <a:avLst/>
-          </a:prstGeom>
-          <a:ln w="12700">
-            <a:solidFill>
-              <a:srgbClr val="000000"/>
-            </a:solidFill>
-          </a:ln>
-        </p:spPr>
-      </p:cxnSp>
-      <p:cxnSp>
-        <p:nvCxnSpPr>
-          <p:cNvPr id="0" name=""/>
-          <p:cNvCxnSpPr/>
-          <p:nvPr/>
-        </p:nvCxnSpPr>
-        <p:spPr>
-          <a:xfrm flipH="1" flipV="1">
-            <a:off x="6071458" y="1948763"/>
-            <a:ext cx="14866" cy="25967"/>
-          </a:xfrm>
-          <a:prstGeom prst="line">
-            <a:avLst/>
-          </a:prstGeom>
-          <a:ln w="12700">
-            <a:solidFill>
-              <a:srgbClr val="000000"/>
-            </a:solidFill>
-          </a:ln>
-        </p:spPr>
-      </p:cxnSp>
-      <p:cxnSp>
-        <p:nvCxnSpPr>
-          <p:cNvPr id="0" name=""/>
-          <p:cNvCxnSpPr/>
-          <p:nvPr/>
-        </p:nvCxnSpPr>
-        <p:spPr>
-          <a:xfrm flipH="1" flipV="1">
-            <a:off x="6055657" y="1923354"/>
-            <a:ext cx="15800" cy="25409"/>
-          </a:xfrm>
-          <a:prstGeom prst="line">
-            <a:avLst/>
-          </a:prstGeom>
-          <a:ln w="12700">
-            <a:solidFill>
-              <a:srgbClr val="000000"/>
-            </a:solidFill>
-          </a:ln>
-        </p:spPr>
-      </p:cxnSp>
-      <p:cxnSp>
-        <p:nvCxnSpPr>
-          <p:cNvPr id="0" name=""/>
-          <p:cNvCxnSpPr/>
-          <p:nvPr/>
-        </p:nvCxnSpPr>
-        <p:spPr>
-          <a:xfrm flipH="1" flipV="1">
-            <a:off x="6038943" y="1898535"/>
-            <a:ext cx="16714" cy="24818"/>
-          </a:xfrm>
-          <a:prstGeom prst="line">
-            <a:avLst/>
-          </a:prstGeom>
-          <a:ln w="12700">
-            <a:solidFill>
-              <a:srgbClr val="000000"/>
-            </a:solidFill>
-          </a:ln>
-        </p:spPr>
-      </p:cxnSp>
-      <p:sp>
-        <p:nvSpPr>
-          <p:cNvPr id="11" name="TextBox 10"/>
-          <p:cNvSpPr txBox="1"/>
-          <p:nvPr/>
-        </p:nvSpPr>
-        <p:spPr>
-          <a:xfrm>
-            <a:off x="6104248" y="1767775"/>
-            <a:ext cx="548640" cy="365760"/>
-          </a:xfrm>
-          <a:prstGeom prst="rect">
-            <a:avLst/>
-          </a:prstGeom>
-          <a:noFill/>
-        </p:spPr>
-        <p:txBody>
-          <a:bodyPr wrap="none">
-            <a:spAutoFit/>
-          </a:bodyPr>
-          <a:lstStyle/>
-          <a:p>
-            <a:pPr algn="ctr"/>
-            <a:r>
-              <a:rPr sz="1600" b="0" i="1">
-                <a:solidFill>
-                  <a:srgbClr val="000000"/>
-                </a:solidFill>
-                <a:latin typeface="Times New Roman"/>
-              </a:rPr>
-              <a:t>δ</a:t>
-            </a:r>
-          </a:p>
-        </p:txBody>
-      </p:sp>
-      <p:sp>
-        <p:nvSpPr>
-          <p:cNvPr id="12" name="TextBox 11"/>
-          <p:cNvSpPr txBox="1"/>
-          <p:nvPr/>
-        </p:nvSpPr>
-        <p:spPr>
-          <a:xfrm rot="19500000">
-            <a:off x="3596119" y="2843361"/>
-            <a:ext cx="548640" cy="365760"/>
-          </a:xfrm>
-          <a:prstGeom prst="rect">
-            <a:avLst/>
-          </a:prstGeom>
-          <a:noFill/>
-        </p:spPr>
-        <p:txBody>
-          <a:bodyPr wrap="none">
-            <a:spAutoFit/>
-          </a:bodyPr>
-          <a:lstStyle/>
-          <a:p>
-            <a:pPr algn="ctr"/>
-            <a:r>
-              <a:rPr sz="1600" b="0" i="1">
-                <a:solidFill>
-                  <a:srgbClr val="000000"/>
-                </a:solidFill>
-                <a:latin typeface="Times New Roman"/>
-              </a:rPr>
-              <a:t>L</a:t>
-            </a:r>
-          </a:p>
-        </p:txBody>
-      </p:sp>
+          </p:spPr>
+          <p:txBody>
+            <a:bodyPr wrap="square" rtlCol="0">
+              <a:spAutoFit/>
+            </a:bodyPr>
+            <a:lstStyle/>
+            <a:p>
+              <a:r>
+                <a:rPr lang="en-US" altLang="zh-CN" dirty="0">
+                  <a:latin typeface="Times New Roman" panose="02020603050405020304" pitchFamily="18" charset="0"/>
+                  <a:cs typeface="Times New Roman" panose="02020603050405020304" pitchFamily="18" charset="0"/>
+                </a:rPr>
+                <a:t>Y</a:t>
+              </a:r>
+              <a:endParaRPr lang="zh-CN" altLang="en-US" dirty="0">
+                <a:latin typeface="Times New Roman" panose="02020603050405020304" pitchFamily="18" charset="0"/>
+                <a:cs typeface="Times New Roman" panose="02020603050405020304" pitchFamily="18" charset="0"/>
+              </a:endParaRPr>
+            </a:p>
+          </p:txBody>
+        </p:sp>
+      </p:grpSp>
     </p:spTree>
+    <p:extLst>
+      <p:ext uri="{BB962C8B-B14F-4D97-AF65-F5344CB8AC3E}">
+        <p14:creationId xmlns:p14="http://schemas.microsoft.com/office/powerpoint/2010/main" val="1629148230"/>
+      </p:ext>
+    </p:extLst>
   </p:cSld>
   <p:clrMapOvr>
     <a:masterClrMapping/>
@@ -4597,5 +5940,10 @@
     </a:lnDef>
   </a:objectDefaults>
   <a:extraClrSchemeLst/>
+  <a:extLst>
+    <a:ext uri="{05A4C25C-085E-4340-85A3-A5531E510DB2}">
+      <thm15:themeFamily xmlns:thm15="http://schemas.microsoft.com/office/thememl/2012/main" name="Office Theme" id="{62F939B6-93AF-4DB8-9C6B-D6C7DFDC589F}" vid="{4A3C46E8-61CC-4603-A589-7422A47A8E4A}"/>
+    </a:ext>
+  </a:extLst>
 </a:theme>
 </file>